--- a/6_Montecarlo Simulation.pptx
+++ b/6_Montecarlo Simulation.pptx
@@ -5,10 +5,10 @@
     <p:sldMasterId id="2147483648" r:id="rId4"/>
   </p:sldMasterIdLst>
   <p:notesMasterIdLst>
-    <p:notesMasterId r:id="rId16"/>
+    <p:notesMasterId r:id="rId17"/>
   </p:notesMasterIdLst>
   <p:handoutMasterIdLst>
-    <p:handoutMasterId r:id="rId17"/>
+    <p:handoutMasterId r:id="rId18"/>
   </p:handoutMasterIdLst>
   <p:sldIdLst>
     <p:sldId id="256" r:id="rId5"/>
@@ -17,11 +17,12 @@
     <p:sldId id="305" r:id="rId8"/>
     <p:sldId id="307" r:id="rId9"/>
     <p:sldId id="306" r:id="rId10"/>
-    <p:sldId id="308" r:id="rId11"/>
-    <p:sldId id="312" r:id="rId12"/>
-    <p:sldId id="311" r:id="rId13"/>
-    <p:sldId id="309" r:id="rId14"/>
-    <p:sldId id="310" r:id="rId15"/>
+    <p:sldId id="388" r:id="rId11"/>
+    <p:sldId id="308" r:id="rId12"/>
+    <p:sldId id="312" r:id="rId13"/>
+    <p:sldId id="311" r:id="rId14"/>
+    <p:sldId id="309" r:id="rId15"/>
+    <p:sldId id="310" r:id="rId16"/>
   </p:sldIdLst>
   <p:sldSz cx="12188825" cy="6858000"/>
   <p:notesSz cx="6858000" cy="9144000"/>
@@ -243,7 +244,7 @@
                 <a:latin typeface="맑은 고딕" panose="020B0503020000020004" pitchFamily="50" charset="-127"/>
                 <a:ea typeface="맑은 고딕" panose="020B0503020000020004" pitchFamily="50" charset="-127"/>
               </a:rPr>
-              <a:t>2026-03-25</a:t>
+              <a:t>2026-03-27</a:t>
             </a:fld>
             <a:endParaRPr lang="ko-KR" altLang="en-US" dirty="0">
               <a:latin typeface="맑은 고딕" panose="020B0503020000020004" pitchFamily="50" charset="-127"/>
@@ -430,7 +431,7 @@
             <a:fld id="{39DBE7D5-AA2D-4B26-8C69-8B60D39FD5EE}" type="datetime1">
               <a:rPr lang="ko-KR" altLang="en-US" smtClean="0"/>
               <a:pPr/>
-              <a:t>2026-03-25</a:t>
+              <a:t>2026-03-27</a:t>
             </a:fld>
             <a:endParaRPr lang="ko-KR" altLang="en-US" dirty="0"/>
           </a:p>
@@ -799,6 +800,115 @@
         <p:cNvPr id="1" name="">
           <a:extLst>
             <a:ext uri="{FF2B5EF4-FFF2-40B4-BE49-F238E27FC236}">
+              <a16:creationId xmlns:a16="http://schemas.microsoft.com/office/drawing/2014/main" id="{98661178-D3A3-BD01-999B-5CD0CBDA675B}"/>
+            </a:ext>
+          </a:extLst>
+        </p:cNvPr>
+        <p:cNvGrpSpPr/>
+        <p:nvPr/>
+      </p:nvGrpSpPr>
+      <p:grpSpPr>
+        <a:xfrm>
+          <a:off x="0" y="0"/>
+          <a:ext cx="0" cy="0"/>
+          <a:chOff x="0" y="0"/>
+          <a:chExt cx="0" cy="0"/>
+        </a:xfrm>
+      </p:grpSpPr>
+      <p:sp>
+        <p:nvSpPr>
+          <p:cNvPr id="2" name="슬라이드 이미지 개체 틀 1">
+            <a:extLst>
+              <a:ext uri="{FF2B5EF4-FFF2-40B4-BE49-F238E27FC236}">
+                <a16:creationId xmlns:a16="http://schemas.microsoft.com/office/drawing/2014/main" id="{894B66A9-55C3-DC1E-3535-AD5D96B3015C}"/>
+              </a:ext>
+            </a:extLst>
+          </p:cNvPr>
+          <p:cNvSpPr>
+            <a:spLocks noGrp="1" noRot="1" noChangeAspect="1"/>
+          </p:cNvSpPr>
+          <p:nvPr>
+            <p:ph type="sldImg"/>
+          </p:nvPr>
+        </p:nvSpPr>
+        <p:spPr/>
+      </p:sp>
+      <p:sp>
+        <p:nvSpPr>
+          <p:cNvPr id="3" name="슬라이드 노트 개체 틀 2">
+            <a:extLst>
+              <a:ext uri="{FF2B5EF4-FFF2-40B4-BE49-F238E27FC236}">
+                <a16:creationId xmlns:a16="http://schemas.microsoft.com/office/drawing/2014/main" id="{497FFF2B-2B71-B514-D49C-EF7B099DE9BF}"/>
+              </a:ext>
+            </a:extLst>
+          </p:cNvPr>
+          <p:cNvSpPr>
+            <a:spLocks noGrp="1"/>
+          </p:cNvSpPr>
+          <p:nvPr>
+            <p:ph type="body" idx="1"/>
+          </p:nvPr>
+        </p:nvSpPr>
+        <p:spPr/>
+        <p:txBody>
+          <a:bodyPr/>
+          <a:lstStyle/>
+          <a:p>
+            <a:endParaRPr lang="ko-KR" altLang="en-US" dirty="0"/>
+          </a:p>
+        </p:txBody>
+      </p:sp>
+      <p:sp>
+        <p:nvSpPr>
+          <p:cNvPr id="4" name="슬라이드 번호 개체 틀 3">
+            <a:extLst>
+              <a:ext uri="{FF2B5EF4-FFF2-40B4-BE49-F238E27FC236}">
+                <a16:creationId xmlns:a16="http://schemas.microsoft.com/office/drawing/2014/main" id="{108E91CB-DE8C-2792-9462-33EFA4D63E67}"/>
+              </a:ext>
+            </a:extLst>
+          </p:cNvPr>
+          <p:cNvSpPr>
+            <a:spLocks noGrp="1"/>
+          </p:cNvSpPr>
+          <p:nvPr>
+            <p:ph type="sldNum" sz="quarter" idx="10"/>
+          </p:nvPr>
+        </p:nvSpPr>
+        <p:spPr/>
+        <p:txBody>
+          <a:bodyPr/>
+          <a:lstStyle/>
+          <a:p>
+            <a:pPr rtl="0"/>
+            <a:fld id="{5FB91549-43BF-425A-AF25-75262019208C}" type="slidenum">
+              <a:rPr lang="en-US" altLang="ko-KR" smtClean="0"/>
+              <a:t>10</a:t>
+            </a:fld>
+            <a:endParaRPr lang="ko-KR" altLang="en-US" dirty="0"/>
+          </a:p>
+        </p:txBody>
+      </p:sp>
+    </p:spTree>
+    <p:extLst>
+      <p:ext uri="{BB962C8B-B14F-4D97-AF65-F5344CB8AC3E}">
+        <p14:creationId xmlns:p14="http://schemas.microsoft.com/office/powerpoint/2010/main" val="3953977907"/>
+      </p:ext>
+    </p:extLst>
+  </p:cSld>
+  <p:clrMapOvr>
+    <a:masterClrMapping/>
+  </p:clrMapOvr>
+</p:notes>
+</file>
+
+<file path=ppt/notesSlides/notesSlide11.xml><?xml version="1.0" encoding="utf-8"?>
+<p:notes xmlns:a="http://schemas.openxmlformats.org/drawingml/2006/main" xmlns:r="http://schemas.openxmlformats.org/officeDocument/2006/relationships" xmlns:p="http://schemas.openxmlformats.org/presentationml/2006/main">
+  <p:cSld>
+    <p:spTree>
+      <p:nvGrpSpPr>
+        <p:cNvPr id="1" name="">
+          <a:extLst>
+            <a:ext uri="{FF2B5EF4-FFF2-40B4-BE49-F238E27FC236}">
               <a16:creationId xmlns:a16="http://schemas.microsoft.com/office/drawing/2014/main" id="{97800921-2A98-58A1-77F4-D8659C0BA353}"/>
             </a:ext>
           </a:extLst>
@@ -881,7 +991,7 @@
             <a:pPr rtl="0"/>
             <a:fld id="{5FB91549-43BF-425A-AF25-75262019208C}" type="slidenum">
               <a:rPr lang="en-US" altLang="ko-KR" smtClean="0"/>
-              <a:t>10</a:t>
+              <a:t>11</a:t>
             </a:fld>
             <a:endParaRPr lang="ko-KR" altLang="en-US" dirty="0"/>
           </a:p>
@@ -900,7 +1010,7 @@
 </p:notes>
 </file>
 
-<file path=ppt/notesSlides/notesSlide11.xml><?xml version="1.0" encoding="utf-8"?>
+<file path=ppt/notesSlides/notesSlide12.xml><?xml version="1.0" encoding="utf-8"?>
 <p:notes xmlns:a="http://schemas.openxmlformats.org/drawingml/2006/main" xmlns:r="http://schemas.openxmlformats.org/officeDocument/2006/relationships" xmlns:p="http://schemas.openxmlformats.org/presentationml/2006/main">
   <p:cSld>
     <p:spTree>
@@ -990,7 +1100,7 @@
             <a:pPr rtl="0"/>
             <a:fld id="{5FB91549-43BF-425A-AF25-75262019208C}" type="slidenum">
               <a:rPr lang="en-US" altLang="ko-KR" smtClean="0"/>
-              <a:t>11</a:t>
+              <a:t>12</a:t>
             </a:fld>
             <a:endParaRPr lang="ko-KR" altLang="en-US" dirty="0"/>
           </a:p>
@@ -1538,6 +1648,115 @@
         <p:cNvPr id="1" name="">
           <a:extLst>
             <a:ext uri="{FF2B5EF4-FFF2-40B4-BE49-F238E27FC236}">
+              <a16:creationId xmlns:a16="http://schemas.microsoft.com/office/drawing/2014/main" id="{9E6E1B4F-B913-2BE9-9359-92236640D2AB}"/>
+            </a:ext>
+          </a:extLst>
+        </p:cNvPr>
+        <p:cNvGrpSpPr/>
+        <p:nvPr/>
+      </p:nvGrpSpPr>
+      <p:grpSpPr>
+        <a:xfrm>
+          <a:off x="0" y="0"/>
+          <a:ext cx="0" cy="0"/>
+          <a:chOff x="0" y="0"/>
+          <a:chExt cx="0" cy="0"/>
+        </a:xfrm>
+      </p:grpSpPr>
+      <p:sp>
+        <p:nvSpPr>
+          <p:cNvPr id="2" name="슬라이드 이미지 개체 틀 1">
+            <a:extLst>
+              <a:ext uri="{FF2B5EF4-FFF2-40B4-BE49-F238E27FC236}">
+                <a16:creationId xmlns:a16="http://schemas.microsoft.com/office/drawing/2014/main" id="{9D04812E-3253-4341-DC46-78222B0B4D16}"/>
+              </a:ext>
+            </a:extLst>
+          </p:cNvPr>
+          <p:cNvSpPr>
+            <a:spLocks noGrp="1" noRot="1" noChangeAspect="1"/>
+          </p:cNvSpPr>
+          <p:nvPr>
+            <p:ph type="sldImg"/>
+          </p:nvPr>
+        </p:nvSpPr>
+        <p:spPr/>
+      </p:sp>
+      <p:sp>
+        <p:nvSpPr>
+          <p:cNvPr id="3" name="슬라이드 노트 개체 틀 2">
+            <a:extLst>
+              <a:ext uri="{FF2B5EF4-FFF2-40B4-BE49-F238E27FC236}">
+                <a16:creationId xmlns:a16="http://schemas.microsoft.com/office/drawing/2014/main" id="{86AE9E0F-6313-3502-1A05-E35F3B8F3620}"/>
+              </a:ext>
+            </a:extLst>
+          </p:cNvPr>
+          <p:cNvSpPr>
+            <a:spLocks noGrp="1"/>
+          </p:cNvSpPr>
+          <p:nvPr>
+            <p:ph type="body" idx="1"/>
+          </p:nvPr>
+        </p:nvSpPr>
+        <p:spPr/>
+        <p:txBody>
+          <a:bodyPr/>
+          <a:lstStyle/>
+          <a:p>
+            <a:endParaRPr lang="ko-KR" altLang="en-US" dirty="0"/>
+          </a:p>
+        </p:txBody>
+      </p:sp>
+      <p:sp>
+        <p:nvSpPr>
+          <p:cNvPr id="4" name="슬라이드 번호 개체 틀 3">
+            <a:extLst>
+              <a:ext uri="{FF2B5EF4-FFF2-40B4-BE49-F238E27FC236}">
+                <a16:creationId xmlns:a16="http://schemas.microsoft.com/office/drawing/2014/main" id="{0D54258E-45FA-3A7A-F9D1-024A700EB7C6}"/>
+              </a:ext>
+            </a:extLst>
+          </p:cNvPr>
+          <p:cNvSpPr>
+            <a:spLocks noGrp="1"/>
+          </p:cNvSpPr>
+          <p:nvPr>
+            <p:ph type="sldNum" sz="quarter" idx="10"/>
+          </p:nvPr>
+        </p:nvSpPr>
+        <p:spPr/>
+        <p:txBody>
+          <a:bodyPr/>
+          <a:lstStyle/>
+          <a:p>
+            <a:pPr rtl="0"/>
+            <a:fld id="{5FB91549-43BF-425A-AF25-75262019208C}" type="slidenum">
+              <a:rPr lang="en-US" altLang="ko-KR" smtClean="0"/>
+              <a:t>7</a:t>
+            </a:fld>
+            <a:endParaRPr lang="ko-KR" altLang="en-US" dirty="0"/>
+          </a:p>
+        </p:txBody>
+      </p:sp>
+    </p:spTree>
+    <p:extLst>
+      <p:ext uri="{BB962C8B-B14F-4D97-AF65-F5344CB8AC3E}">
+        <p14:creationId xmlns:p14="http://schemas.microsoft.com/office/powerpoint/2010/main" val="2960263439"/>
+      </p:ext>
+    </p:extLst>
+  </p:cSld>
+  <p:clrMapOvr>
+    <a:masterClrMapping/>
+  </p:clrMapOvr>
+</p:notes>
+</file>
+
+<file path=ppt/notesSlides/notesSlide8.xml><?xml version="1.0" encoding="utf-8"?>
+<p:notes xmlns:a="http://schemas.openxmlformats.org/drawingml/2006/main" xmlns:r="http://schemas.openxmlformats.org/officeDocument/2006/relationships" xmlns:p="http://schemas.openxmlformats.org/presentationml/2006/main">
+  <p:cSld>
+    <p:spTree>
+      <p:nvGrpSpPr>
+        <p:cNvPr id="1" name="">
+          <a:extLst>
+            <a:ext uri="{FF2B5EF4-FFF2-40B4-BE49-F238E27FC236}">
               <a16:creationId xmlns:a16="http://schemas.microsoft.com/office/drawing/2014/main" id="{FC427E54-28B2-8C19-528B-8C781240BA4D}"/>
             </a:ext>
           </a:extLst>
@@ -1620,7 +1839,7 @@
             <a:pPr rtl="0"/>
             <a:fld id="{5FB91549-43BF-425A-AF25-75262019208C}" type="slidenum">
               <a:rPr lang="en-US" altLang="ko-KR" smtClean="0"/>
-              <a:t>7</a:t>
+              <a:t>8</a:t>
             </a:fld>
             <a:endParaRPr lang="ko-KR" altLang="en-US" dirty="0"/>
           </a:p>
@@ -1639,7 +1858,7 @@
 </p:notes>
 </file>
 
-<file path=ppt/notesSlides/notesSlide8.xml><?xml version="1.0" encoding="utf-8"?>
+<file path=ppt/notesSlides/notesSlide9.xml><?xml version="1.0" encoding="utf-8"?>
 <p:notes xmlns:a="http://schemas.openxmlformats.org/drawingml/2006/main" xmlns:r="http://schemas.openxmlformats.org/officeDocument/2006/relationships" xmlns:p="http://schemas.openxmlformats.org/presentationml/2006/main">
   <p:cSld>
     <p:spTree>
@@ -1729,7 +1948,7 @@
             <a:pPr rtl="0"/>
             <a:fld id="{5FB91549-43BF-425A-AF25-75262019208C}" type="slidenum">
               <a:rPr lang="en-US" altLang="ko-KR" smtClean="0"/>
-              <a:t>8</a:t>
+              <a:t>9</a:t>
             </a:fld>
             <a:endParaRPr lang="ko-KR" altLang="en-US" dirty="0"/>
           </a:p>
@@ -1739,115 +1958,6 @@
     <p:extLst>
       <p:ext uri="{BB962C8B-B14F-4D97-AF65-F5344CB8AC3E}">
         <p14:creationId xmlns:p14="http://schemas.microsoft.com/office/powerpoint/2010/main" val="363948702"/>
-      </p:ext>
-    </p:extLst>
-  </p:cSld>
-  <p:clrMapOvr>
-    <a:masterClrMapping/>
-  </p:clrMapOvr>
-</p:notes>
-</file>
-
-<file path=ppt/notesSlides/notesSlide9.xml><?xml version="1.0" encoding="utf-8"?>
-<p:notes xmlns:a="http://schemas.openxmlformats.org/drawingml/2006/main" xmlns:r="http://schemas.openxmlformats.org/officeDocument/2006/relationships" xmlns:p="http://schemas.openxmlformats.org/presentationml/2006/main">
-  <p:cSld>
-    <p:spTree>
-      <p:nvGrpSpPr>
-        <p:cNvPr id="1" name="">
-          <a:extLst>
-            <a:ext uri="{FF2B5EF4-FFF2-40B4-BE49-F238E27FC236}">
-              <a16:creationId xmlns:a16="http://schemas.microsoft.com/office/drawing/2014/main" id="{98661178-D3A3-BD01-999B-5CD0CBDA675B}"/>
-            </a:ext>
-          </a:extLst>
-        </p:cNvPr>
-        <p:cNvGrpSpPr/>
-        <p:nvPr/>
-      </p:nvGrpSpPr>
-      <p:grpSpPr>
-        <a:xfrm>
-          <a:off x="0" y="0"/>
-          <a:ext cx="0" cy="0"/>
-          <a:chOff x="0" y="0"/>
-          <a:chExt cx="0" cy="0"/>
-        </a:xfrm>
-      </p:grpSpPr>
-      <p:sp>
-        <p:nvSpPr>
-          <p:cNvPr id="2" name="슬라이드 이미지 개체 틀 1">
-            <a:extLst>
-              <a:ext uri="{FF2B5EF4-FFF2-40B4-BE49-F238E27FC236}">
-                <a16:creationId xmlns:a16="http://schemas.microsoft.com/office/drawing/2014/main" id="{894B66A9-55C3-DC1E-3535-AD5D96B3015C}"/>
-              </a:ext>
-            </a:extLst>
-          </p:cNvPr>
-          <p:cNvSpPr>
-            <a:spLocks noGrp="1" noRot="1" noChangeAspect="1"/>
-          </p:cNvSpPr>
-          <p:nvPr>
-            <p:ph type="sldImg"/>
-          </p:nvPr>
-        </p:nvSpPr>
-        <p:spPr/>
-      </p:sp>
-      <p:sp>
-        <p:nvSpPr>
-          <p:cNvPr id="3" name="슬라이드 노트 개체 틀 2">
-            <a:extLst>
-              <a:ext uri="{FF2B5EF4-FFF2-40B4-BE49-F238E27FC236}">
-                <a16:creationId xmlns:a16="http://schemas.microsoft.com/office/drawing/2014/main" id="{497FFF2B-2B71-B514-D49C-EF7B099DE9BF}"/>
-              </a:ext>
-            </a:extLst>
-          </p:cNvPr>
-          <p:cNvSpPr>
-            <a:spLocks noGrp="1"/>
-          </p:cNvSpPr>
-          <p:nvPr>
-            <p:ph type="body" idx="1"/>
-          </p:nvPr>
-        </p:nvSpPr>
-        <p:spPr/>
-        <p:txBody>
-          <a:bodyPr/>
-          <a:lstStyle/>
-          <a:p>
-            <a:endParaRPr lang="ko-KR" altLang="en-US" dirty="0"/>
-          </a:p>
-        </p:txBody>
-      </p:sp>
-      <p:sp>
-        <p:nvSpPr>
-          <p:cNvPr id="4" name="슬라이드 번호 개체 틀 3">
-            <a:extLst>
-              <a:ext uri="{FF2B5EF4-FFF2-40B4-BE49-F238E27FC236}">
-                <a16:creationId xmlns:a16="http://schemas.microsoft.com/office/drawing/2014/main" id="{108E91CB-DE8C-2792-9462-33EFA4D63E67}"/>
-              </a:ext>
-            </a:extLst>
-          </p:cNvPr>
-          <p:cNvSpPr>
-            <a:spLocks noGrp="1"/>
-          </p:cNvSpPr>
-          <p:nvPr>
-            <p:ph type="sldNum" sz="quarter" idx="10"/>
-          </p:nvPr>
-        </p:nvSpPr>
-        <p:spPr/>
-        <p:txBody>
-          <a:bodyPr/>
-          <a:lstStyle/>
-          <a:p>
-            <a:pPr rtl="0"/>
-            <a:fld id="{5FB91549-43BF-425A-AF25-75262019208C}" type="slidenum">
-              <a:rPr lang="en-US" altLang="ko-KR" smtClean="0"/>
-              <a:t>9</a:t>
-            </a:fld>
-            <a:endParaRPr lang="ko-KR" altLang="en-US" dirty="0"/>
-          </a:p>
-        </p:txBody>
-      </p:sp>
-    </p:spTree>
-    <p:extLst>
-      <p:ext uri="{BB962C8B-B14F-4D97-AF65-F5344CB8AC3E}">
-        <p14:creationId xmlns:p14="http://schemas.microsoft.com/office/powerpoint/2010/main" val="3953977907"/>
       </p:ext>
     </p:extLst>
   </p:cSld>
@@ -2095,7 +2205,7 @@
           <a:p>
             <a:fld id="{4B229CEB-779D-4AB3-81CB-8FCEEAE03F61}" type="datetime1">
               <a:rPr lang="ko-KR" altLang="en-US" smtClean="0"/>
-              <a:t>2026-03-25</a:t>
+              <a:t>2026-03-27</a:t>
             </a:fld>
             <a:endParaRPr lang="ko-KR" altLang="en-US" dirty="0"/>
           </a:p>
@@ -2333,7 +2443,7 @@
             <a:pPr rtl="0"/>
             <a:fld id="{C3B7A883-0BF0-4B4B-84D5-D747A0111A56}" type="datetime1">
               <a:rPr lang="ko-KR" altLang="en-US" noProof="0" smtClean="0"/>
-              <a:t>2026-03-25</a:t>
+              <a:t>2026-03-27</a:t>
             </a:fld>
             <a:endParaRPr lang="ko-KR" altLang="en-US" noProof="0" dirty="0"/>
           </a:p>
@@ -2551,7 +2661,7 @@
             <a:pPr rtl="0"/>
             <a:fld id="{3DA7EA29-F2BB-4FB1-BB4B-C55A7FA3FC5C}" type="datetime1">
               <a:rPr lang="ko-KR" altLang="en-US" noProof="0" smtClean="0"/>
-              <a:t>2026-03-25</a:t>
+              <a:t>2026-03-27</a:t>
             </a:fld>
             <a:endParaRPr lang="ko-KR" altLang="en-US" noProof="0" dirty="0"/>
           </a:p>
@@ -2760,7 +2870,7 @@
             <a:pPr rtl="0"/>
             <a:fld id="{D76306AB-75A0-421C-B431-0E4E30A5C28E}" type="datetime1">
               <a:rPr lang="ko-KR" altLang="en-US" noProof="0" smtClean="0"/>
-              <a:t>2026-03-25</a:t>
+              <a:t>2026-03-27</a:t>
             </a:fld>
             <a:endParaRPr lang="ko-KR" altLang="en-US" noProof="0" dirty="0"/>
           </a:p>
@@ -3030,7 +3140,7 @@
             <a:pPr rtl="0"/>
             <a:fld id="{E1D969EE-F1EB-462E-B70D-5B36B3806A4E}" type="datetime1">
               <a:rPr lang="ko-KR" altLang="en-US" noProof="0" smtClean="0"/>
-              <a:t>2026-03-25</a:t>
+              <a:t>2026-03-27</a:t>
             </a:fld>
             <a:endParaRPr lang="ko-KR" altLang="en-US" noProof="0" dirty="0"/>
           </a:p>
@@ -3338,7 +3448,7 @@
             <a:pPr rtl="0"/>
             <a:fld id="{E8CBB1B7-E0A1-46A3-B5B5-C69931095FF6}" type="datetime1">
               <a:rPr lang="ko-KR" altLang="en-US" noProof="0" smtClean="0"/>
-              <a:t>2026-03-25</a:t>
+              <a:t>2026-03-27</a:t>
             </a:fld>
             <a:endParaRPr lang="ko-KR" altLang="en-US" noProof="0" dirty="0"/>
           </a:p>
@@ -3789,7 +3899,7 @@
             <a:pPr rtl="0"/>
             <a:fld id="{DAFC0E65-06AB-44D7-AAEE-8F4C7ED84A0C}" type="datetime1">
               <a:rPr lang="ko-KR" altLang="en-US" noProof="0" smtClean="0"/>
-              <a:t>2026-03-25</a:t>
+              <a:t>2026-03-27</a:t>
             </a:fld>
             <a:endParaRPr lang="ko-KR" altLang="en-US" noProof="0" dirty="0"/>
           </a:p>
@@ -3926,7 +4036,7 @@
             <a:pPr rtl="0"/>
             <a:fld id="{30189E66-D439-4767-B911-EB49CB20E313}" type="datetime1">
               <a:rPr lang="ko-KR" altLang="en-US" noProof="0" smtClean="0"/>
-              <a:t>2026-03-25</a:t>
+              <a:t>2026-03-27</a:t>
             </a:fld>
             <a:endParaRPr lang="ko-KR" altLang="en-US" noProof="0" dirty="0"/>
           </a:p>
@@ -4039,7 +4149,7 @@
             <a:pPr rtl="0"/>
             <a:fld id="{D4E4FFC0-DB28-4291-80A0-63DBF8428320}" type="datetime1">
               <a:rPr lang="ko-KR" altLang="en-US" noProof="0" smtClean="0"/>
-              <a:t>2026-03-25</a:t>
+              <a:t>2026-03-27</a:t>
             </a:fld>
             <a:endParaRPr lang="ko-KR" altLang="en-US" noProof="0" dirty="0"/>
           </a:p>
@@ -4344,7 +4454,7 @@
             <a:pPr rtl="0"/>
             <a:fld id="{3AB5804B-C38E-4214-93DF-3E6DA00134E8}" type="datetime1">
               <a:rPr lang="ko-KR" altLang="en-US" noProof="0" smtClean="0"/>
-              <a:t>2026-03-25</a:t>
+              <a:t>2026-03-27</a:t>
             </a:fld>
             <a:endParaRPr lang="ko-KR" altLang="en-US" noProof="0" dirty="0"/>
           </a:p>
@@ -4638,7 +4748,7 @@
             <a:pPr rtl="0"/>
             <a:fld id="{CABEE384-F18F-4153-AC21-608599869F84}" type="datetime1">
               <a:rPr lang="ko-KR" altLang="en-US" noProof="0" smtClean="0"/>
-              <a:t>2026-03-25</a:t>
+              <a:t>2026-03-27</a:t>
             </a:fld>
             <a:endParaRPr lang="ko-KR" altLang="en-US" noProof="0" dirty="0"/>
           </a:p>
@@ -4870,7 +4980,7 @@
           <a:p>
             <a:fld id="{667A4C69-65FB-481C-AC2A-84D254D33675}" type="datetime1">
               <a:rPr lang="ko-KR" altLang="en-US" smtClean="0"/>
-              <a:t>2026-03-25</a:t>
+              <a:t>2026-03-27</a:t>
             </a:fld>
             <a:endParaRPr lang="ko-KR" altLang="en-US" dirty="0"/>
           </a:p>
@@ -5527,7 +5637,7 @@
         <p:cNvPr id="1" name="">
           <a:extLst>
             <a:ext uri="{FF2B5EF4-FFF2-40B4-BE49-F238E27FC236}">
-              <a16:creationId xmlns:a16="http://schemas.microsoft.com/office/drawing/2014/main" id="{014016E6-4DF5-97F6-9486-23E46F5C4A36}"/>
+              <a16:creationId xmlns:a16="http://schemas.microsoft.com/office/drawing/2014/main" id="{D82F35E0-A8BA-9E25-DCE5-002AF8EF7215}"/>
             </a:ext>
           </a:extLst>
         </p:cNvPr>
@@ -5547,7 +5657,7 @@
           <p:cNvPr id="2" name="슬라이드 번호 개체 틀 1">
             <a:extLst>
               <a:ext uri="{FF2B5EF4-FFF2-40B4-BE49-F238E27FC236}">
-                <a16:creationId xmlns:a16="http://schemas.microsoft.com/office/drawing/2014/main" id="{A39D4B50-D754-79A0-CD51-823002DF348F}"/>
+                <a16:creationId xmlns:a16="http://schemas.microsoft.com/office/drawing/2014/main" id="{CA6F4F7E-6F61-4FB4-D872-D19D234DDFD9}"/>
               </a:ext>
             </a:extLst>
           </p:cNvPr>
@@ -5577,7 +5687,7 @@
           <p:cNvPr id="4" name="TextBox 3">
             <a:extLst>
               <a:ext uri="{FF2B5EF4-FFF2-40B4-BE49-F238E27FC236}">
-                <a16:creationId xmlns:a16="http://schemas.microsoft.com/office/drawing/2014/main" id="{6843735A-526C-E0D0-66F8-62A3BD4EC82F}"/>
+                <a16:creationId xmlns:a16="http://schemas.microsoft.com/office/drawing/2014/main" id="{0FFED543-95FD-70FD-6206-68419637947A}"/>
               </a:ext>
             </a:extLst>
           </p:cNvPr>
@@ -5586,8 +5696,8 @@
         </p:nvSpPr>
         <p:spPr>
           <a:xfrm>
-            <a:off x="693812" y="2276872"/>
-            <a:ext cx="11233248" cy="3606821"/>
+            <a:off x="765820" y="1196752"/>
+            <a:ext cx="11233248" cy="882999"/>
           </a:xfrm>
           <a:prstGeom prst="rect">
             <a:avLst/>
@@ -5617,363 +5727,139 @@
                 <a:latin typeface="휴먼모음T" panose="02030504000101010101" pitchFamily="18" charset="-127"/>
                 <a:ea typeface="휴먼모음T" panose="02030504000101010101" pitchFamily="18" charset="-127"/>
               </a:rPr>
-              <a:t>모델 학습의 안정성 확보”</a:t>
+              <a:t>모집단의 회귀식의 </a:t>
+            </a:r>
+            <a:r>
+              <a:rPr lang="en-US" altLang="ko-KR" dirty="0">
+                <a:latin typeface="휴먼모음T" panose="02030504000101010101" pitchFamily="18" charset="-127"/>
+                <a:ea typeface="휴먼모음T" panose="02030504000101010101" pitchFamily="18" charset="-127"/>
+              </a:rPr>
+              <a:t>gradient(</a:t>
+            </a:r>
+            <a:r>
+              <a:rPr lang="ko-KR" altLang="en-US" dirty="0">
+                <a:latin typeface="휴먼모음T" panose="02030504000101010101" pitchFamily="18" charset="-127"/>
+                <a:ea typeface="휴먼모음T" panose="02030504000101010101" pitchFamily="18" charset="-127"/>
+              </a:rPr>
+              <a:t>기울기</a:t>
+            </a:r>
+            <a:r>
+              <a:rPr lang="en-US" altLang="ko-KR" dirty="0">
+                <a:latin typeface="휴먼모음T" panose="02030504000101010101" pitchFamily="18" charset="-127"/>
+                <a:ea typeface="휴먼모음T" panose="02030504000101010101" pitchFamily="18" charset="-127"/>
+              </a:rPr>
+              <a:t>)</a:t>
+            </a:r>
+            <a:r>
+              <a:rPr lang="ko-KR" altLang="en-US" dirty="0">
+                <a:latin typeface="휴먼모음T" panose="02030504000101010101" pitchFamily="18" charset="-127"/>
+                <a:ea typeface="휴먼모음T" panose="02030504000101010101" pitchFamily="18" charset="-127"/>
+              </a:rPr>
+              <a:t> </a:t>
+            </a:r>
+            <a:r>
+              <a:rPr lang="en-US" altLang="ko-KR" dirty="0">
+                <a:latin typeface="휴먼모음T" panose="02030504000101010101" pitchFamily="18" charset="-127"/>
+                <a:ea typeface="휴먼모음T" panose="02030504000101010101" pitchFamily="18" charset="-127"/>
+              </a:rPr>
+              <a:t>2</a:t>
+            </a:r>
+            <a:r>
+              <a:rPr lang="ko-KR" altLang="en-US" dirty="0">
+                <a:latin typeface="휴먼모음T" panose="02030504000101010101" pitchFamily="18" charset="-127"/>
+                <a:ea typeface="휴먼모음T" panose="02030504000101010101" pitchFamily="18" charset="-127"/>
+              </a:rPr>
+              <a:t>인 데이터를 생성하고 표본크기를 </a:t>
+            </a:r>
+            <a:r>
+              <a:rPr lang="en-US" altLang="ko-KR" dirty="0">
+                <a:latin typeface="휴먼모음T" panose="02030504000101010101" pitchFamily="18" charset="-127"/>
+                <a:ea typeface="휴먼모음T" panose="02030504000101010101" pitchFamily="18" charset="-127"/>
+              </a:rPr>
+              <a:t>5, 30, 100 </a:t>
+            </a:r>
+            <a:r>
+              <a:rPr lang="ko-KR" altLang="en-US" dirty="0">
+                <a:latin typeface="휴먼모음T" panose="02030504000101010101" pitchFamily="18" charset="-127"/>
+                <a:ea typeface="휴먼모음T" panose="02030504000101010101" pitchFamily="18" charset="-127"/>
+              </a:rPr>
+              <a:t>으로 각각 </a:t>
+            </a:r>
+            <a:r>
+              <a:rPr lang="en-US" altLang="ko-KR" dirty="0">
+                <a:latin typeface="휴먼모음T" panose="02030504000101010101" pitchFamily="18" charset="-127"/>
+                <a:ea typeface="휴먼모음T" panose="02030504000101010101" pitchFamily="18" charset="-127"/>
+              </a:rPr>
+              <a:t>1000</a:t>
+            </a:r>
+            <a:r>
+              <a:rPr lang="ko-KR" altLang="en-US" dirty="0">
+                <a:latin typeface="휴먼모음T" panose="02030504000101010101" pitchFamily="18" charset="-127"/>
+                <a:ea typeface="휴먼모음T" panose="02030504000101010101" pitchFamily="18" charset="-127"/>
+              </a:rPr>
+              <a:t>개 표본의 기울기와 </a:t>
+            </a:r>
+            <a:r>
+              <a:rPr lang="en-US" altLang="ko-KR" dirty="0">
+                <a:latin typeface="휴먼모음T" panose="02030504000101010101" pitchFamily="18" charset="-127"/>
+                <a:ea typeface="휴먼모음T" panose="02030504000101010101" pitchFamily="18" charset="-127"/>
+              </a:rPr>
+              <a:t>MSE(Mean</a:t>
+            </a:r>
+            <a:r>
+              <a:rPr lang="ko-KR" altLang="en-US" dirty="0">
+                <a:latin typeface="휴먼모음T" panose="02030504000101010101" pitchFamily="18" charset="-127"/>
+                <a:ea typeface="휴먼모음T" panose="02030504000101010101" pitchFamily="18" charset="-127"/>
+              </a:rPr>
+              <a:t> </a:t>
+            </a:r>
+            <a:r>
+              <a:rPr lang="en-US" altLang="ko-KR" dirty="0">
+                <a:latin typeface="휴먼모음T" panose="02030504000101010101" pitchFamily="18" charset="-127"/>
+                <a:ea typeface="휴먼모음T" panose="02030504000101010101" pitchFamily="18" charset="-127"/>
+              </a:rPr>
+              <a:t>Squared</a:t>
+            </a:r>
+            <a:r>
+              <a:rPr lang="ko-KR" altLang="en-US" dirty="0">
+                <a:latin typeface="휴먼모음T" panose="02030504000101010101" pitchFamily="18" charset="-127"/>
+                <a:ea typeface="휴먼모음T" panose="02030504000101010101" pitchFamily="18" charset="-127"/>
+              </a:rPr>
+              <a:t> </a:t>
+            </a:r>
+            <a:r>
+              <a:rPr lang="en-US" altLang="ko-KR" dirty="0">
+                <a:latin typeface="휴먼모음T" panose="02030504000101010101" pitchFamily="18" charset="-127"/>
+                <a:ea typeface="휴먼모음T" panose="02030504000101010101" pitchFamily="18" charset="-127"/>
+              </a:rPr>
+              <a:t>Error)</a:t>
+            </a:r>
+            <a:r>
+              <a:rPr lang="ko-KR" altLang="en-US" dirty="0">
+                <a:latin typeface="휴먼모음T" panose="02030504000101010101" pitchFamily="18" charset="-127"/>
+                <a:ea typeface="휴먼모음T" panose="02030504000101010101" pitchFamily="18" charset="-127"/>
+              </a:rPr>
+              <a:t>의 평균과 분산을 </a:t>
+            </a:r>
+            <a:r>
+              <a:rPr lang="ko-KR" altLang="en-US" dirty="0" err="1">
+                <a:latin typeface="휴먼모음T" panose="02030504000101010101" pitchFamily="18" charset="-127"/>
+                <a:ea typeface="휴먼모음T" panose="02030504000101010101" pitchFamily="18" charset="-127"/>
+              </a:rPr>
+              <a:t>시각화하라</a:t>
+            </a:r>
+            <a:r>
+              <a:rPr lang="ko-KR" altLang="en-US" dirty="0">
+                <a:latin typeface="휴먼모음T" panose="02030504000101010101" pitchFamily="18" charset="-127"/>
+                <a:ea typeface="휴먼모음T" panose="02030504000101010101" pitchFamily="18" charset="-127"/>
+              </a:rPr>
+              <a:t>  </a:t>
             </a:r>
             <a:endParaRPr lang="en-US" altLang="ko-KR" dirty="0">
               <a:latin typeface="휴먼모음T" panose="02030504000101010101" pitchFamily="18" charset="-127"/>
               <a:ea typeface="휴먼모음T" panose="02030504000101010101" pitchFamily="18" charset="-127"/>
             </a:endParaRPr>
           </a:p>
-          <a:p>
-            <a:pPr marL="742950" lvl="1" indent="-285750">
-              <a:lnSpc>
-                <a:spcPct val="150000"/>
-              </a:lnSpc>
-              <a:buFont typeface="Wingdings" panose="05000000000000000000" pitchFamily="2" charset="2"/>
-              <a:buChar char="v"/>
-            </a:pPr>
-            <a:r>
-              <a:rPr lang="en-US" altLang="ko-KR" sz="1600" dirty="0">
-                <a:latin typeface="휴먼모음T" panose="02030504000101010101" pitchFamily="18" charset="-127"/>
-                <a:ea typeface="휴먼모음T" panose="02030504000101010101" pitchFamily="18" charset="-127"/>
-              </a:rPr>
-              <a:t>MSE , Cross-Entropy, Log-loss </a:t>
-            </a:r>
-            <a:endParaRPr lang="en-US" altLang="ko-KR" dirty="0">
-              <a:latin typeface="휴먼모음T" panose="02030504000101010101" pitchFamily="18" charset="-127"/>
-              <a:ea typeface="휴먼모음T" panose="02030504000101010101" pitchFamily="18" charset="-127"/>
-            </a:endParaRPr>
-          </a:p>
-          <a:p>
-            <a:pPr marL="285750" indent="-285750">
-              <a:lnSpc>
-                <a:spcPct val="150000"/>
-              </a:lnSpc>
-              <a:buFont typeface="Wingdings" panose="05000000000000000000" pitchFamily="2" charset="2"/>
-              <a:buChar char="v"/>
-            </a:pPr>
-            <a:r>
-              <a:rPr lang="en-US" altLang="ko-KR" dirty="0">
-                <a:latin typeface="휴먼모음T" panose="02030504000101010101" pitchFamily="18" charset="-127"/>
-                <a:ea typeface="휴먼모음T" panose="02030504000101010101" pitchFamily="18" charset="-127"/>
-              </a:rPr>
-              <a:t>Mini-batch </a:t>
-            </a:r>
-            <a:r>
-              <a:rPr lang="ko-KR" altLang="en-US" dirty="0">
-                <a:latin typeface="휴먼모음T" panose="02030504000101010101" pitchFamily="18" charset="-127"/>
-                <a:ea typeface="휴먼모음T" panose="02030504000101010101" pitchFamily="18" charset="-127"/>
-              </a:rPr>
-              <a:t>학습이 가능한 이유”</a:t>
-            </a:r>
-            <a:endParaRPr lang="en-US" altLang="ko-KR" dirty="0">
-              <a:latin typeface="휴먼모음T" panose="02030504000101010101" pitchFamily="18" charset="-127"/>
-              <a:ea typeface="휴먼모음T" panose="02030504000101010101" pitchFamily="18" charset="-127"/>
-            </a:endParaRPr>
-          </a:p>
-          <a:p>
-            <a:pPr marL="742950" lvl="1" indent="-285750">
-              <a:lnSpc>
-                <a:spcPct val="150000"/>
-              </a:lnSpc>
-              <a:buFont typeface="Wingdings" panose="05000000000000000000" pitchFamily="2" charset="2"/>
-              <a:buChar char="v"/>
-            </a:pPr>
-            <a:r>
-              <a:rPr lang="en-US" altLang="ko-KR" sz="1600" dirty="0">
-                <a:latin typeface="휴먼모음T" panose="02030504000101010101" pitchFamily="18" charset="-127"/>
-                <a:ea typeface="휴먼모음T" panose="02030504000101010101" pitchFamily="18" charset="-127"/>
-              </a:rPr>
-              <a:t>Mini-batch = </a:t>
-            </a:r>
-            <a:r>
-              <a:rPr lang="ko-KR" altLang="en-US" sz="1600" dirty="0">
-                <a:latin typeface="휴먼모음T" panose="02030504000101010101" pitchFamily="18" charset="-127"/>
-                <a:ea typeface="휴먼모음T" panose="02030504000101010101" pitchFamily="18" charset="-127"/>
-              </a:rPr>
-              <a:t>작은 샘플 평균</a:t>
-            </a:r>
-            <a:r>
-              <a:rPr lang="en-US" altLang="ko-KR" sz="1600" dirty="0">
-                <a:latin typeface="휴먼모음T" panose="02030504000101010101" pitchFamily="18" charset="-127"/>
-                <a:ea typeface="휴먼모음T" panose="02030504000101010101" pitchFamily="18" charset="-127"/>
-              </a:rPr>
-              <a:t>, CLT</a:t>
-            </a:r>
-            <a:r>
-              <a:rPr lang="ko-KR" altLang="en-US" sz="1600" dirty="0">
-                <a:latin typeface="휴먼모음T" panose="02030504000101010101" pitchFamily="18" charset="-127"/>
-                <a:ea typeface="휴먼모음T" panose="02030504000101010101" pitchFamily="18" charset="-127"/>
-              </a:rPr>
-              <a:t>없이는 </a:t>
-            </a:r>
-            <a:r>
-              <a:rPr lang="en-US" altLang="ko-KR" sz="1600" dirty="0">
-                <a:latin typeface="휴먼모음T" panose="02030504000101010101" pitchFamily="18" charset="-127"/>
-                <a:ea typeface="휴먼모음T" panose="02030504000101010101" pitchFamily="18" charset="-127"/>
-              </a:rPr>
-              <a:t>mini</a:t>
-            </a:r>
-            <a:r>
-              <a:rPr lang="ko-KR" altLang="en-US" sz="1600" dirty="0">
-                <a:latin typeface="휴먼모음T" panose="02030504000101010101" pitchFamily="18" charset="-127"/>
-                <a:ea typeface="휴먼모음T" panose="02030504000101010101" pitchFamily="18" charset="-127"/>
-              </a:rPr>
-              <a:t> </a:t>
-            </a:r>
-            <a:r>
-              <a:rPr lang="en-US" altLang="ko-KR" sz="1600" dirty="0">
-                <a:latin typeface="휴먼모음T" panose="02030504000101010101" pitchFamily="18" charset="-127"/>
-                <a:ea typeface="휴먼모음T" panose="02030504000101010101" pitchFamily="18" charset="-127"/>
-              </a:rPr>
-              <a:t>batch </a:t>
-            </a:r>
-            <a:r>
-              <a:rPr lang="ko-KR" altLang="en-US" sz="1600" dirty="0">
-                <a:latin typeface="휴먼모음T" panose="02030504000101010101" pitchFamily="18" charset="-127"/>
-                <a:ea typeface="휴먼모음T" panose="02030504000101010101" pitchFamily="18" charset="-127"/>
-              </a:rPr>
-              <a:t>도 없음</a:t>
-            </a:r>
-            <a:endParaRPr lang="en-US" altLang="ko-KR" dirty="0">
-              <a:latin typeface="휴먼모음T" panose="02030504000101010101" pitchFamily="18" charset="-127"/>
-              <a:ea typeface="휴먼모음T" panose="02030504000101010101" pitchFamily="18" charset="-127"/>
-            </a:endParaRPr>
-          </a:p>
-          <a:p>
-            <a:pPr marL="285750" indent="-285750">
-              <a:lnSpc>
-                <a:spcPct val="150000"/>
-              </a:lnSpc>
-              <a:buFont typeface="Wingdings" panose="05000000000000000000" pitchFamily="2" charset="2"/>
-              <a:buChar char="v"/>
-            </a:pPr>
-            <a:r>
-              <a:rPr lang="ko-KR" altLang="en-US" dirty="0">
-                <a:latin typeface="휴먼모음T" panose="02030504000101010101" pitchFamily="18" charset="-127"/>
-                <a:ea typeface="휴먼모음T" panose="02030504000101010101" pitchFamily="18" charset="-127"/>
-              </a:rPr>
-              <a:t>교차검증을 통한 모델의 평가</a:t>
-            </a:r>
-            <a:endParaRPr lang="en-US" altLang="ko-KR" dirty="0">
-              <a:latin typeface="휴먼모음T" panose="02030504000101010101" pitchFamily="18" charset="-127"/>
-              <a:ea typeface="휴먼모음T" panose="02030504000101010101" pitchFamily="18" charset="-127"/>
-            </a:endParaRPr>
-          </a:p>
-          <a:p>
-            <a:pPr marL="742950" lvl="1" indent="-285750">
-              <a:lnSpc>
-                <a:spcPct val="150000"/>
-              </a:lnSpc>
-              <a:buFont typeface="Wingdings" panose="05000000000000000000" pitchFamily="2" charset="2"/>
-              <a:buChar char="v"/>
-            </a:pPr>
-            <a:r>
-              <a:rPr lang="ko-KR" altLang="en-US" sz="1600" dirty="0">
-                <a:latin typeface="휴먼모음T" panose="02030504000101010101" pitchFamily="18" charset="-127"/>
-                <a:ea typeface="휴먼모음T" panose="02030504000101010101" pitchFamily="18" charset="-127"/>
-              </a:rPr>
-              <a:t>평균 </a:t>
-            </a:r>
-            <a:r>
-              <a:rPr lang="en-US" altLang="ko-KR" sz="1600" dirty="0">
-                <a:latin typeface="휴먼모음T" panose="02030504000101010101" pitchFamily="18" charset="-127"/>
-                <a:ea typeface="휴먼모음T" panose="02030504000101010101" pitchFamily="18" charset="-127"/>
-              </a:rPr>
-              <a:t>accuracy/loss, </a:t>
-            </a:r>
-            <a:r>
-              <a:rPr lang="ko-KR" altLang="en-US" sz="1600" dirty="0">
-                <a:latin typeface="휴먼모음T" panose="02030504000101010101" pitchFamily="18" charset="-127"/>
-                <a:ea typeface="휴먼모음T" panose="02030504000101010101" pitchFamily="18" charset="-127"/>
-              </a:rPr>
-              <a:t>교차검증 평균 등 </a:t>
-            </a:r>
-            <a:r>
-              <a:rPr lang="en-US" altLang="ko-KR" sz="1600" dirty="0">
-                <a:latin typeface="휴먼모음T" panose="02030504000101010101" pitchFamily="18" charset="-127"/>
-                <a:ea typeface="휴먼모음T" panose="02030504000101010101" pitchFamily="18" charset="-127"/>
-              </a:rPr>
-              <a:t>CLT </a:t>
-            </a:r>
-            <a:r>
-              <a:rPr lang="ko-KR" altLang="en-US" sz="1600" dirty="0">
-                <a:latin typeface="휴먼모음T" panose="02030504000101010101" pitchFamily="18" charset="-127"/>
-                <a:ea typeface="휴먼모음T" panose="02030504000101010101" pitchFamily="18" charset="-127"/>
-              </a:rPr>
-              <a:t>적용으로 이  평균들은 → 정규분포 근사</a:t>
-            </a:r>
-            <a:r>
-              <a:rPr lang="en-US" altLang="ko-KR" sz="1600" dirty="0">
-                <a:latin typeface="휴먼모음T" panose="02030504000101010101" pitchFamily="18" charset="-127"/>
-                <a:ea typeface="휴먼모음T" panose="02030504000101010101" pitchFamily="18" charset="-127"/>
-              </a:rPr>
-              <a:t> </a:t>
-            </a:r>
-            <a:r>
-              <a:rPr lang="ko-KR" altLang="en-US" sz="1600" dirty="0">
-                <a:latin typeface="휴먼모음T" panose="02030504000101010101" pitchFamily="18" charset="-127"/>
-                <a:ea typeface="휴먼모음T" panose="02030504000101010101" pitchFamily="18" charset="-127"/>
-              </a:rPr>
-              <a:t>→ 신뢰구간</a:t>
-            </a:r>
-            <a:r>
-              <a:rPr lang="en-US" altLang="ko-KR" sz="1600" dirty="0">
-                <a:latin typeface="휴먼모음T" panose="02030504000101010101" pitchFamily="18" charset="-127"/>
-                <a:ea typeface="휴먼모음T" panose="02030504000101010101" pitchFamily="18" charset="-127"/>
-              </a:rPr>
-              <a:t> </a:t>
-            </a:r>
-            <a:r>
-              <a:rPr lang="ko-KR" altLang="en-US" sz="1600" dirty="0">
-                <a:latin typeface="휴먼모음T" panose="02030504000101010101" pitchFamily="18" charset="-127"/>
-                <a:ea typeface="휴먼모음T" panose="02030504000101010101" pitchFamily="18" charset="-127"/>
-              </a:rPr>
-              <a:t>→</a:t>
-            </a:r>
-            <a:r>
-              <a:rPr lang="en-US" altLang="ko-KR" sz="1600" dirty="0">
-                <a:latin typeface="휴먼모음T" panose="02030504000101010101" pitchFamily="18" charset="-127"/>
-                <a:ea typeface="휴먼모음T" panose="02030504000101010101" pitchFamily="18" charset="-127"/>
-              </a:rPr>
-              <a:t> </a:t>
-            </a:r>
-            <a:r>
-              <a:rPr lang="ko-KR" altLang="en-US" sz="1600" dirty="0">
-                <a:latin typeface="휴먼모음T" panose="02030504000101010101" pitchFamily="18" charset="-127"/>
-                <a:ea typeface="휴먼모음T" panose="02030504000101010101" pitchFamily="18" charset="-127"/>
-              </a:rPr>
-              <a:t>통계적 비교 가능</a:t>
-            </a:r>
-            <a:endParaRPr lang="en-US" altLang="ko-KR" dirty="0">
-              <a:latin typeface="휴먼모음T" panose="02030504000101010101" pitchFamily="18" charset="-127"/>
-              <a:ea typeface="휴먼모음T" panose="02030504000101010101" pitchFamily="18" charset="-127"/>
-            </a:endParaRPr>
-          </a:p>
-          <a:p>
-            <a:pPr marL="285750" indent="-285750">
-              <a:lnSpc>
-                <a:spcPct val="150000"/>
-              </a:lnSpc>
-              <a:buFont typeface="Wingdings" panose="05000000000000000000" pitchFamily="2" charset="2"/>
-              <a:buChar char="v"/>
-            </a:pPr>
-            <a:r>
-              <a:rPr lang="en-US" altLang="ko-KR" dirty="0">
-                <a:latin typeface="휴먼모음T" panose="02030504000101010101" pitchFamily="18" charset="-127"/>
-                <a:ea typeface="휴먼모음T" panose="02030504000101010101" pitchFamily="18" charset="-127"/>
-              </a:rPr>
-              <a:t>A/B </a:t>
-            </a:r>
-            <a:r>
-              <a:rPr lang="ko-KR" altLang="en-US" dirty="0">
-                <a:latin typeface="휴먼모음T" panose="02030504000101010101" pitchFamily="18" charset="-127"/>
-                <a:ea typeface="휴먼모음T" panose="02030504000101010101" pitchFamily="18" charset="-127"/>
-              </a:rPr>
-              <a:t>테스트와 실험 설계의 핵심</a:t>
-            </a:r>
-            <a:endParaRPr lang="en-US" altLang="ko-KR" dirty="0">
-              <a:latin typeface="휴먼모음T" panose="02030504000101010101" pitchFamily="18" charset="-127"/>
-              <a:ea typeface="휴먼모음T" panose="02030504000101010101" pitchFamily="18" charset="-127"/>
-            </a:endParaRPr>
-          </a:p>
-          <a:p>
-            <a:pPr marL="742950" lvl="1" indent="-285750">
-              <a:lnSpc>
-                <a:spcPct val="150000"/>
-              </a:lnSpc>
-              <a:buFont typeface="Wingdings" panose="05000000000000000000" pitchFamily="2" charset="2"/>
-              <a:buChar char="v"/>
-            </a:pPr>
-            <a:r>
-              <a:rPr lang="ko-KR" altLang="en-US" sz="1600" dirty="0">
-                <a:latin typeface="휴먼모음T" panose="02030504000101010101" pitchFamily="18" charset="-127"/>
-                <a:ea typeface="휴먼모음T" panose="02030504000101010101" pitchFamily="18" charset="-127"/>
-              </a:rPr>
-              <a:t>광고 효과 비교</a:t>
-            </a:r>
-            <a:r>
-              <a:rPr lang="en-US" altLang="ko-KR" sz="1600" dirty="0">
-                <a:latin typeface="휴먼모음T" panose="02030504000101010101" pitchFamily="18" charset="-127"/>
-                <a:ea typeface="휴먼모음T" panose="02030504000101010101" pitchFamily="18" charset="-127"/>
-              </a:rPr>
-              <a:t>, </a:t>
-            </a:r>
-            <a:r>
-              <a:rPr lang="ko-KR" altLang="en-US" sz="1600" dirty="0">
-                <a:latin typeface="휴먼모음T" panose="02030504000101010101" pitchFamily="18" charset="-127"/>
-                <a:ea typeface="휴먼모음T" panose="02030504000101010101" pitchFamily="18" charset="-127"/>
-              </a:rPr>
-              <a:t>추천 알고리즘 비교</a:t>
-            </a:r>
-            <a:r>
-              <a:rPr lang="en-US" altLang="ko-KR" sz="1600" dirty="0">
-                <a:latin typeface="휴먼모음T" panose="02030504000101010101" pitchFamily="18" charset="-127"/>
-                <a:ea typeface="휴먼모음T" panose="02030504000101010101" pitchFamily="18" charset="-127"/>
-              </a:rPr>
-              <a:t>, UI </a:t>
-            </a:r>
-            <a:r>
-              <a:rPr lang="ko-KR" altLang="en-US" sz="1600" dirty="0">
-                <a:latin typeface="휴먼모음T" panose="02030504000101010101" pitchFamily="18" charset="-127"/>
-                <a:ea typeface="휴먼모음T" panose="02030504000101010101" pitchFamily="18" charset="-127"/>
-              </a:rPr>
-              <a:t>개선 효과 측정  등 전부 평균 비교 문제로 </a:t>
-            </a:r>
-            <a:r>
-              <a:rPr lang="en-US" altLang="ko-KR" sz="1600" dirty="0">
-                <a:latin typeface="휴먼모음T" panose="02030504000101010101" pitchFamily="18" charset="-127"/>
-                <a:ea typeface="휴먼모음T" panose="02030504000101010101" pitchFamily="18" charset="-127"/>
-              </a:rPr>
-              <a:t>CLT </a:t>
-            </a:r>
-            <a:r>
-              <a:rPr lang="ko-KR" altLang="en-US" sz="1600" dirty="0">
-                <a:latin typeface="휴먼모음T" panose="02030504000101010101" pitchFamily="18" charset="-127"/>
-                <a:ea typeface="휴먼모음T" panose="02030504000101010101" pitchFamily="18" charset="-127"/>
-              </a:rPr>
-              <a:t>덕분에</a:t>
-            </a:r>
-            <a:r>
-              <a:rPr lang="en-US" altLang="ko-KR" sz="1600" dirty="0">
-                <a:latin typeface="휴먼모음T" panose="02030504000101010101" pitchFamily="18" charset="-127"/>
-                <a:ea typeface="휴먼모음T" panose="02030504000101010101" pitchFamily="18" charset="-127"/>
-              </a:rPr>
-              <a:t> </a:t>
-            </a:r>
-            <a:r>
-              <a:rPr lang="ko-KR" altLang="en-US" sz="1600" dirty="0">
-                <a:latin typeface="휴먼모음T" panose="02030504000101010101" pitchFamily="18" charset="-127"/>
-                <a:ea typeface="휴먼모음T" panose="02030504000101010101" pitchFamily="18" charset="-127"/>
-              </a:rPr>
-              <a:t>두 평균 차이 → 정규분포 근사 → </a:t>
-            </a:r>
-            <a:r>
-              <a:rPr lang="en-US" altLang="ko-KR" sz="1600" dirty="0">
-                <a:latin typeface="휴먼모음T" panose="02030504000101010101" pitchFamily="18" charset="-127"/>
-                <a:ea typeface="휴먼모음T" panose="02030504000101010101" pitchFamily="18" charset="-127"/>
-              </a:rPr>
-              <a:t>p-value </a:t>
-            </a:r>
-            <a:r>
-              <a:rPr lang="ko-KR" altLang="en-US" sz="1600" dirty="0">
-                <a:latin typeface="휴먼모음T" panose="02030504000101010101" pitchFamily="18" charset="-127"/>
-                <a:ea typeface="휴먼모음T" panose="02030504000101010101" pitchFamily="18" charset="-127"/>
-              </a:rPr>
-              <a:t>계산 가능</a:t>
-            </a:r>
-            <a:r>
-              <a:rPr lang="ko-KR" altLang="en-US" dirty="0">
-                <a:latin typeface="휴먼모음T" panose="02030504000101010101" pitchFamily="18" charset="-127"/>
-                <a:ea typeface="휴먼모음T" panose="02030504000101010101" pitchFamily="18" charset="-127"/>
-              </a:rPr>
-              <a:t> </a:t>
-            </a:r>
-            <a:endParaRPr lang="en-US" altLang="ko-KR" sz="2000" dirty="0">
-              <a:latin typeface="휴먼모음T" panose="02030504000101010101" pitchFamily="18" charset="-127"/>
-              <a:ea typeface="휴먼모음T" panose="02030504000101010101" pitchFamily="18" charset="-127"/>
-            </a:endParaRPr>
-          </a:p>
         </p:txBody>
       </p:sp>
       <p:sp>
@@ -5981,7 +5867,7 @@
           <p:cNvPr id="9" name="TextBox 8">
             <a:extLst>
               <a:ext uri="{FF2B5EF4-FFF2-40B4-BE49-F238E27FC236}">
-                <a16:creationId xmlns:a16="http://schemas.microsoft.com/office/drawing/2014/main" id="{185A9784-515E-A3E4-8F67-F24BA80B28DC}"/>
+                <a16:creationId xmlns:a16="http://schemas.microsoft.com/office/drawing/2014/main" id="{F30D0FE0-2695-7F37-8905-B8DE24E7A394}"/>
               </a:ext>
             </a:extLst>
           </p:cNvPr>
@@ -6011,12 +5897,59 @@
           </a:p>
         </p:txBody>
       </p:sp>
+      <p:pic>
+        <p:nvPicPr>
+          <p:cNvPr id="1026" name="Picture 2">
+            <a:extLst>
+              <a:ext uri="{FF2B5EF4-FFF2-40B4-BE49-F238E27FC236}">
+                <a16:creationId xmlns:a16="http://schemas.microsoft.com/office/drawing/2014/main" id="{66A96551-6CD7-9DE7-087B-11A115B1C22B}"/>
+              </a:ext>
+            </a:extLst>
+          </p:cNvPr>
+          <p:cNvPicPr>
+            <a:picLocks noChangeAspect="1" noChangeArrowheads="1"/>
+          </p:cNvPicPr>
+          <p:nvPr/>
+        </p:nvPicPr>
+        <p:blipFill>
+          <a:blip r:embed="rId3">
+            <a:extLst>
+              <a:ext uri="{28A0092B-C50C-407E-A947-70E740481C1C}">
+                <a14:useLocalDpi xmlns:a14="http://schemas.microsoft.com/office/drawing/2010/main" val="0"/>
+              </a:ext>
+            </a:extLst>
+          </a:blip>
+          <a:srcRect/>
+          <a:stretch>
+            <a:fillRect/>
+          </a:stretch>
+        </p:blipFill>
+        <p:spPr bwMode="auto">
+          <a:xfrm>
+            <a:off x="333772" y="3162993"/>
+            <a:ext cx="3721378" cy="2899706"/>
+          </a:xfrm>
+          <a:prstGeom prst="rect">
+            <a:avLst/>
+          </a:prstGeom>
+          <a:noFill/>
+          <a:extLst>
+            <a:ext uri="{909E8E84-426E-40DD-AFC4-6F175D3DCCD1}">
+              <a14:hiddenFill xmlns:a14="http://schemas.microsoft.com/office/drawing/2010/main">
+                <a:solidFill>
+                  <a:srgbClr val="FFFFFF"/>
+                </a:solidFill>
+              </a14:hiddenFill>
+            </a:ext>
+          </a:extLst>
+        </p:spPr>
+      </p:pic>
       <p:sp>
         <p:nvSpPr>
           <p:cNvPr id="5" name="TextBox 4">
             <a:extLst>
               <a:ext uri="{FF2B5EF4-FFF2-40B4-BE49-F238E27FC236}">
-                <a16:creationId xmlns:a16="http://schemas.microsoft.com/office/drawing/2014/main" id="{52039815-B66C-C01C-F725-1707E5711FCB}"/>
+                <a16:creationId xmlns:a16="http://schemas.microsoft.com/office/drawing/2014/main" id="{92D6731E-3482-342B-4CF9-362C40D676CA}"/>
               </a:ext>
             </a:extLst>
           </p:cNvPr>
@@ -6025,8 +5958,8 @@
         </p:nvSpPr>
         <p:spPr>
           <a:xfrm>
-            <a:off x="549796" y="858989"/>
-            <a:ext cx="11377264" cy="970843"/>
+            <a:off x="261764" y="2422823"/>
+            <a:ext cx="3721378" cy="718145"/>
           </a:xfrm>
           <a:prstGeom prst="rect">
             <a:avLst/>
@@ -6039,87 +5972,199 @@
           </a:bodyPr>
           <a:lstStyle/>
           <a:p>
-            <a:pPr marL="285750" indent="-285750">
+            <a:pPr>
               <a:lnSpc>
-                <a:spcPct val="150000"/>
+                <a:spcPts val="1575"/>
               </a:lnSpc>
-              <a:buFont typeface="Wingdings" panose="05000000000000000000" pitchFamily="2" charset="2"/>
-              <a:buChar char="v"/>
+              <a:buNone/>
             </a:pPr>
             <a:r>
-              <a:rPr lang="ko-KR" altLang="en-US" sz="2000" dirty="0">
-                <a:latin typeface="휴먼모음T" panose="02030504000101010101" pitchFamily="18" charset="-127"/>
-                <a:ea typeface="휴먼모음T" panose="02030504000101010101" pitchFamily="18" charset="-127"/>
-              </a:rPr>
-              <a:t>중심극한정리</a:t>
-            </a:r>
-            <a:r>
-              <a:rPr lang="en-US" altLang="ko-KR" sz="2000" dirty="0">
-                <a:latin typeface="휴먼모음T" panose="02030504000101010101" pitchFamily="18" charset="-127"/>
-                <a:ea typeface="휴먼모음T" panose="02030504000101010101" pitchFamily="18" charset="-127"/>
-              </a:rPr>
-              <a:t>(</a:t>
-            </a:r>
-            <a:r>
-              <a:rPr lang="ko-KR" altLang="en-US" sz="2000" dirty="0">
-                <a:latin typeface="휴먼모음T" panose="02030504000101010101" pitchFamily="18" charset="-127"/>
-                <a:ea typeface="휴먼모음T" panose="02030504000101010101" pitchFamily="18" charset="-127"/>
-              </a:rPr>
-              <a:t>데이터는 불규칙하지만</a:t>
-            </a:r>
-            <a:r>
-              <a:rPr lang="en-US" altLang="ko-KR" sz="2000" dirty="0">
-                <a:latin typeface="휴먼모음T" panose="02030504000101010101" pitchFamily="18" charset="-127"/>
-                <a:ea typeface="휴먼모음T" panose="02030504000101010101" pitchFamily="18" charset="-127"/>
-              </a:rPr>
-              <a:t>, </a:t>
-            </a:r>
-            <a:r>
-              <a:rPr lang="ko-KR" altLang="en-US" sz="2000" dirty="0">
-                <a:latin typeface="휴먼모음T" panose="02030504000101010101" pitchFamily="18" charset="-127"/>
-                <a:ea typeface="휴먼모음T" panose="02030504000101010101" pitchFamily="18" charset="-127"/>
-              </a:rPr>
-              <a:t>평균은 예측 가능하다 → 그래서 학습이 가능하다</a:t>
-            </a:r>
-            <a:r>
-              <a:rPr lang="en-US" altLang="ko-KR" sz="2000" dirty="0">
-                <a:latin typeface="휴먼모음T" panose="02030504000101010101" pitchFamily="18" charset="-127"/>
-                <a:ea typeface="휴먼모음T" panose="02030504000101010101" pitchFamily="18" charset="-127"/>
-              </a:rPr>
-              <a:t>)</a:t>
-            </a:r>
-            <a:r>
-              <a:rPr lang="ko-KR" altLang="en-US" sz="2000" dirty="0">
-                <a:latin typeface="휴먼모음T" panose="02030504000101010101" pitchFamily="18" charset="-127"/>
-                <a:ea typeface="휴먼모음T" panose="02030504000101010101" pitchFamily="18" charset="-127"/>
-              </a:rPr>
-              <a:t>가 </a:t>
-            </a:r>
-            <a:r>
-              <a:rPr lang="ko-KR" altLang="en-US" sz="2000" dirty="0" err="1">
-                <a:latin typeface="휴먼모음T" panose="02030504000101010101" pitchFamily="18" charset="-127"/>
-                <a:ea typeface="휴먼모음T" panose="02030504000101010101" pitchFamily="18" charset="-127"/>
-              </a:rPr>
-              <a:t>머신러닝에</a:t>
-            </a:r>
-            <a:r>
-              <a:rPr lang="ko-KR" altLang="en-US" sz="2000" dirty="0">
-                <a:latin typeface="휴먼모음T" panose="02030504000101010101" pitchFamily="18" charset="-127"/>
-                <a:ea typeface="휴먼모음T" panose="02030504000101010101" pitchFamily="18" charset="-127"/>
-              </a:rPr>
-              <a:t> 접목하는 내용을 모의실험으로 파이썬 코드로 제시하라</a:t>
-            </a:r>
-            <a:endParaRPr lang="en-US" altLang="ko-KR" sz="2000" dirty="0">
-              <a:latin typeface="휴먼모음T" panose="02030504000101010101" pitchFamily="18" charset="-127"/>
-              <a:ea typeface="휴먼모음T" panose="02030504000101010101" pitchFamily="18" charset="-127"/>
-            </a:endParaRPr>
-          </a:p>
-        </p:txBody>
-      </p:sp>
+              <a:rPr lang="en-US" altLang="ko-KR" sz="1400" b="0" dirty="0">
+                <a:effectLst/>
+                <a:latin typeface="Arial Narrow" panose="020B0606020202030204" pitchFamily="34" charset="0"/>
+              </a:rPr>
+              <a:t>X = </a:t>
+            </a:r>
+            <a:r>
+              <a:rPr lang="en-US" altLang="ko-KR" sz="1400" b="0" dirty="0" err="1">
+                <a:effectLst/>
+                <a:latin typeface="Arial Narrow" panose="020B0606020202030204" pitchFamily="34" charset="0"/>
+              </a:rPr>
+              <a:t>np.random.randn</a:t>
+            </a:r>
+            <a:r>
+              <a:rPr lang="en-US" altLang="ko-KR" sz="1400" b="0" dirty="0">
+                <a:effectLst/>
+                <a:latin typeface="Arial Narrow" panose="020B0606020202030204" pitchFamily="34" charset="0"/>
+              </a:rPr>
+              <a:t>(10000, 1)</a:t>
+            </a:r>
+          </a:p>
+          <a:p>
+            <a:pPr>
+              <a:lnSpc>
+                <a:spcPts val="1575"/>
+              </a:lnSpc>
+              <a:buNone/>
+            </a:pPr>
+            <a:r>
+              <a:rPr lang="en-US" altLang="ko-KR" sz="1400" b="0" dirty="0" err="1">
+                <a:effectLst/>
+                <a:latin typeface="Arial Narrow" panose="020B0606020202030204" pitchFamily="34" charset="0"/>
+              </a:rPr>
+              <a:t>true_w</a:t>
+            </a:r>
+            <a:r>
+              <a:rPr lang="en-US" altLang="ko-KR" sz="1400" b="0" dirty="0">
+                <a:effectLst/>
+                <a:latin typeface="Arial Narrow" panose="020B0606020202030204" pitchFamily="34" charset="0"/>
+              </a:rPr>
+              <a:t> = 2.0</a:t>
+            </a:r>
+          </a:p>
+          <a:p>
+            <a:pPr>
+              <a:lnSpc>
+                <a:spcPts val="1575"/>
+              </a:lnSpc>
+              <a:buNone/>
+            </a:pPr>
+            <a:r>
+              <a:rPr lang="en-US" altLang="ko-KR" sz="1400" b="0" dirty="0">
+                <a:effectLst/>
+                <a:latin typeface="Arial Narrow" panose="020B0606020202030204" pitchFamily="34" charset="0"/>
+              </a:rPr>
+              <a:t>y = </a:t>
+            </a:r>
+            <a:r>
+              <a:rPr lang="en-US" altLang="ko-KR" sz="1400" b="0" dirty="0" err="1">
+                <a:effectLst/>
+                <a:latin typeface="Arial Narrow" panose="020B0606020202030204" pitchFamily="34" charset="0"/>
+              </a:rPr>
+              <a:t>true_w</a:t>
+            </a:r>
+            <a:r>
+              <a:rPr lang="en-US" altLang="ko-KR" sz="1400" b="0" dirty="0">
+                <a:effectLst/>
+                <a:latin typeface="Arial Narrow" panose="020B0606020202030204" pitchFamily="34" charset="0"/>
+              </a:rPr>
+              <a:t> * X + </a:t>
+            </a:r>
+            <a:r>
+              <a:rPr lang="en-US" altLang="ko-KR" sz="1400" b="0" dirty="0" err="1">
+                <a:effectLst/>
+                <a:latin typeface="Arial Narrow" panose="020B0606020202030204" pitchFamily="34" charset="0"/>
+              </a:rPr>
+              <a:t>np.random.randn</a:t>
+            </a:r>
+            <a:r>
+              <a:rPr lang="en-US" altLang="ko-KR" sz="1400" b="0" dirty="0">
+                <a:effectLst/>
+                <a:latin typeface="Arial Narrow" panose="020B0606020202030204" pitchFamily="34" charset="0"/>
+              </a:rPr>
+              <a:t>(10000, 1) * 0.5</a:t>
+            </a:r>
+          </a:p>
+        </p:txBody>
+      </p:sp>
+      <p:pic>
+        <p:nvPicPr>
+          <p:cNvPr id="1030" name="Picture 6">
+            <a:extLst>
+              <a:ext uri="{FF2B5EF4-FFF2-40B4-BE49-F238E27FC236}">
+                <a16:creationId xmlns:a16="http://schemas.microsoft.com/office/drawing/2014/main" id="{604A6947-78A3-C7CA-2B50-5D00DD4F3DDD}"/>
+              </a:ext>
+            </a:extLst>
+          </p:cNvPr>
+          <p:cNvPicPr>
+            <a:picLocks noChangeAspect="1" noChangeArrowheads="1"/>
+          </p:cNvPicPr>
+          <p:nvPr/>
+        </p:nvPicPr>
+        <p:blipFill>
+          <a:blip r:embed="rId4" cstate="print">
+            <a:extLst>
+              <a:ext uri="{28A0092B-C50C-407E-A947-70E740481C1C}">
+                <a14:useLocalDpi xmlns:a14="http://schemas.microsoft.com/office/drawing/2010/main" val="0"/>
+              </a:ext>
+            </a:extLst>
+          </a:blip>
+          <a:srcRect/>
+          <a:stretch>
+            <a:fillRect/>
+          </a:stretch>
+        </p:blipFill>
+        <p:spPr bwMode="auto">
+          <a:xfrm>
+            <a:off x="5307995" y="2469173"/>
+            <a:ext cx="5832647" cy="1919654"/>
+          </a:xfrm>
+          <a:prstGeom prst="rect">
+            <a:avLst/>
+          </a:prstGeom>
+          <a:noFill/>
+          <a:extLst>
+            <a:ext uri="{909E8E84-426E-40DD-AFC4-6F175D3DCCD1}">
+              <a14:hiddenFill xmlns:a14="http://schemas.microsoft.com/office/drawing/2010/main">
+                <a:solidFill>
+                  <a:srgbClr val="FFFFFF"/>
+                </a:solidFill>
+              </a14:hiddenFill>
+            </a:ext>
+          </a:extLst>
+        </p:spPr>
+      </p:pic>
+      <p:pic>
+        <p:nvPicPr>
+          <p:cNvPr id="1032" name="Picture 8">
+            <a:extLst>
+              <a:ext uri="{FF2B5EF4-FFF2-40B4-BE49-F238E27FC236}">
+                <a16:creationId xmlns:a16="http://schemas.microsoft.com/office/drawing/2014/main" id="{0AC33CC4-6C35-C6FD-C03A-DFEEFB9013D3}"/>
+              </a:ext>
+            </a:extLst>
+          </p:cNvPr>
+          <p:cNvPicPr>
+            <a:picLocks noChangeAspect="1" noChangeArrowheads="1"/>
+          </p:cNvPicPr>
+          <p:nvPr/>
+        </p:nvPicPr>
+        <p:blipFill>
+          <a:blip r:embed="rId5" cstate="print">
+            <a:extLst>
+              <a:ext uri="{28A0092B-C50C-407E-A947-70E740481C1C}">
+                <a14:useLocalDpi xmlns:a14="http://schemas.microsoft.com/office/drawing/2010/main" val="0"/>
+              </a:ext>
+            </a:extLst>
+          </a:blip>
+          <a:srcRect/>
+          <a:stretch>
+            <a:fillRect/>
+          </a:stretch>
+        </p:blipFill>
+        <p:spPr bwMode="auto">
+          <a:xfrm>
+            <a:off x="5302324" y="4701421"/>
+            <a:ext cx="5832647" cy="1919653"/>
+          </a:xfrm>
+          <a:prstGeom prst="rect">
+            <a:avLst/>
+          </a:prstGeom>
+          <a:noFill/>
+          <a:extLst>
+            <a:ext uri="{909E8E84-426E-40DD-AFC4-6F175D3DCCD1}">
+              <a14:hiddenFill xmlns:a14="http://schemas.microsoft.com/office/drawing/2010/main">
+                <a:solidFill>
+                  <a:srgbClr val="FFFFFF"/>
+                </a:solidFill>
+              </a14:hiddenFill>
+            </a:ext>
+          </a:extLst>
+        </p:spPr>
+      </p:pic>
     </p:spTree>
     <p:extLst>
       <p:ext uri="{BB962C8B-B14F-4D97-AF65-F5344CB8AC3E}">
-        <p14:creationId xmlns:p14="http://schemas.microsoft.com/office/powerpoint/2010/main" val="2559646205"/>
+        <p14:creationId xmlns:p14="http://schemas.microsoft.com/office/powerpoint/2010/main" val="2060882861"/>
       </p:ext>
     </p:extLst>
   </p:cSld>
@@ -6149,6 +6194,628 @@
         <p:cNvPr id="1" name="">
           <a:extLst>
             <a:ext uri="{FF2B5EF4-FFF2-40B4-BE49-F238E27FC236}">
+              <a16:creationId xmlns:a16="http://schemas.microsoft.com/office/drawing/2014/main" id="{014016E6-4DF5-97F6-9486-23E46F5C4A36}"/>
+            </a:ext>
+          </a:extLst>
+        </p:cNvPr>
+        <p:cNvGrpSpPr/>
+        <p:nvPr/>
+      </p:nvGrpSpPr>
+      <p:grpSpPr>
+        <a:xfrm>
+          <a:off x="0" y="0"/>
+          <a:ext cx="0" cy="0"/>
+          <a:chOff x="0" y="0"/>
+          <a:chExt cx="0" cy="0"/>
+        </a:xfrm>
+      </p:grpSpPr>
+      <p:sp>
+        <p:nvSpPr>
+          <p:cNvPr id="2" name="슬라이드 번호 개체 틀 1">
+            <a:extLst>
+              <a:ext uri="{FF2B5EF4-FFF2-40B4-BE49-F238E27FC236}">
+                <a16:creationId xmlns:a16="http://schemas.microsoft.com/office/drawing/2014/main" id="{A39D4B50-D754-79A0-CD51-823002DF348F}"/>
+              </a:ext>
+            </a:extLst>
+          </p:cNvPr>
+          <p:cNvSpPr>
+            <a:spLocks noGrp="1"/>
+          </p:cNvSpPr>
+          <p:nvPr>
+            <p:ph type="sldNum" sz="quarter" idx="12"/>
+          </p:nvPr>
+        </p:nvSpPr>
+        <p:spPr/>
+        <p:txBody>
+          <a:bodyPr/>
+          <a:lstStyle/>
+          <a:p>
+            <a:pPr rtl="0"/>
+            <a:fld id="{A3F31473-23EB-4724-8B59-FE6D21D89FA4}" type="slidenum">
+              <a:rPr lang="en-US" altLang="ko-KR" noProof="0" smtClean="0"/>
+              <a:t>11</a:t>
+            </a:fld>
+            <a:endParaRPr lang="en-US" altLang="ko-KR" noProof="0" dirty="0"/>
+          </a:p>
+        </p:txBody>
+      </p:sp>
+      <p:sp>
+        <p:nvSpPr>
+          <p:cNvPr id="4" name="TextBox 3">
+            <a:extLst>
+              <a:ext uri="{FF2B5EF4-FFF2-40B4-BE49-F238E27FC236}">
+                <a16:creationId xmlns:a16="http://schemas.microsoft.com/office/drawing/2014/main" id="{6843735A-526C-E0D0-66F8-62A3BD4EC82F}"/>
+              </a:ext>
+            </a:extLst>
+          </p:cNvPr>
+          <p:cNvSpPr txBox="1"/>
+          <p:nvPr/>
+        </p:nvSpPr>
+        <p:spPr>
+          <a:xfrm>
+            <a:off x="693812" y="2276872"/>
+            <a:ext cx="11233248" cy="3606821"/>
+          </a:xfrm>
+          <a:prstGeom prst="rect">
+            <a:avLst/>
+          </a:prstGeom>
+          <a:solidFill>
+            <a:schemeClr val="tx1">
+              <a:lumMod val="20000"/>
+              <a:lumOff val="80000"/>
+            </a:schemeClr>
+          </a:solidFill>
+        </p:spPr>
+        <p:txBody>
+          <a:bodyPr wrap="square" rtlCol="0">
+            <a:spAutoFit/>
+          </a:bodyPr>
+          <a:lstStyle/>
+          <a:p>
+            <a:pPr marL="285750" indent="-285750">
+              <a:lnSpc>
+                <a:spcPct val="150000"/>
+              </a:lnSpc>
+              <a:buFont typeface="Wingdings" panose="05000000000000000000" pitchFamily="2" charset="2"/>
+              <a:buChar char="v"/>
+            </a:pPr>
+            <a:r>
+              <a:rPr lang="ko-KR" altLang="en-US" dirty="0">
+                <a:latin typeface="휴먼모음T" panose="02030504000101010101" pitchFamily="18" charset="-127"/>
+                <a:ea typeface="휴먼모음T" panose="02030504000101010101" pitchFamily="18" charset="-127"/>
+              </a:rPr>
+              <a:t>모델 학습의 안정성 확보”</a:t>
+            </a:r>
+            <a:endParaRPr lang="en-US" altLang="ko-KR" dirty="0">
+              <a:latin typeface="휴먼모음T" panose="02030504000101010101" pitchFamily="18" charset="-127"/>
+              <a:ea typeface="휴먼모음T" panose="02030504000101010101" pitchFamily="18" charset="-127"/>
+            </a:endParaRPr>
+          </a:p>
+          <a:p>
+            <a:pPr marL="742950" lvl="1" indent="-285750">
+              <a:lnSpc>
+                <a:spcPct val="150000"/>
+              </a:lnSpc>
+              <a:buFont typeface="Wingdings" panose="05000000000000000000" pitchFamily="2" charset="2"/>
+              <a:buChar char="v"/>
+            </a:pPr>
+            <a:r>
+              <a:rPr lang="en-US" altLang="ko-KR" sz="1600" dirty="0">
+                <a:latin typeface="휴먼모음T" panose="02030504000101010101" pitchFamily="18" charset="-127"/>
+                <a:ea typeface="휴먼모음T" panose="02030504000101010101" pitchFamily="18" charset="-127"/>
+              </a:rPr>
+              <a:t>MSE , Cross-Entropy, Log-loss </a:t>
+            </a:r>
+            <a:endParaRPr lang="en-US" altLang="ko-KR" dirty="0">
+              <a:latin typeface="휴먼모음T" panose="02030504000101010101" pitchFamily="18" charset="-127"/>
+              <a:ea typeface="휴먼모음T" panose="02030504000101010101" pitchFamily="18" charset="-127"/>
+            </a:endParaRPr>
+          </a:p>
+          <a:p>
+            <a:pPr marL="285750" indent="-285750">
+              <a:lnSpc>
+                <a:spcPct val="150000"/>
+              </a:lnSpc>
+              <a:buFont typeface="Wingdings" panose="05000000000000000000" pitchFamily="2" charset="2"/>
+              <a:buChar char="v"/>
+            </a:pPr>
+            <a:r>
+              <a:rPr lang="en-US" altLang="ko-KR" dirty="0">
+                <a:latin typeface="휴먼모음T" panose="02030504000101010101" pitchFamily="18" charset="-127"/>
+                <a:ea typeface="휴먼모음T" panose="02030504000101010101" pitchFamily="18" charset="-127"/>
+              </a:rPr>
+              <a:t>Mini-batch </a:t>
+            </a:r>
+            <a:r>
+              <a:rPr lang="ko-KR" altLang="en-US" dirty="0">
+                <a:latin typeface="휴먼모음T" panose="02030504000101010101" pitchFamily="18" charset="-127"/>
+                <a:ea typeface="휴먼모음T" panose="02030504000101010101" pitchFamily="18" charset="-127"/>
+              </a:rPr>
+              <a:t>학습이 가능한 이유”</a:t>
+            </a:r>
+            <a:endParaRPr lang="en-US" altLang="ko-KR" dirty="0">
+              <a:latin typeface="휴먼모음T" panose="02030504000101010101" pitchFamily="18" charset="-127"/>
+              <a:ea typeface="휴먼모음T" panose="02030504000101010101" pitchFamily="18" charset="-127"/>
+            </a:endParaRPr>
+          </a:p>
+          <a:p>
+            <a:pPr marL="742950" lvl="1" indent="-285750">
+              <a:lnSpc>
+                <a:spcPct val="150000"/>
+              </a:lnSpc>
+              <a:buFont typeface="Wingdings" panose="05000000000000000000" pitchFamily="2" charset="2"/>
+              <a:buChar char="v"/>
+            </a:pPr>
+            <a:r>
+              <a:rPr lang="en-US" altLang="ko-KR" sz="1600" dirty="0">
+                <a:latin typeface="휴먼모음T" panose="02030504000101010101" pitchFamily="18" charset="-127"/>
+                <a:ea typeface="휴먼모음T" panose="02030504000101010101" pitchFamily="18" charset="-127"/>
+              </a:rPr>
+              <a:t>Mini-batch = </a:t>
+            </a:r>
+            <a:r>
+              <a:rPr lang="ko-KR" altLang="en-US" sz="1600" dirty="0">
+                <a:latin typeface="휴먼모음T" panose="02030504000101010101" pitchFamily="18" charset="-127"/>
+                <a:ea typeface="휴먼모음T" panose="02030504000101010101" pitchFamily="18" charset="-127"/>
+              </a:rPr>
+              <a:t>작은 샘플 평균</a:t>
+            </a:r>
+            <a:r>
+              <a:rPr lang="en-US" altLang="ko-KR" sz="1600" dirty="0">
+                <a:latin typeface="휴먼모음T" panose="02030504000101010101" pitchFamily="18" charset="-127"/>
+                <a:ea typeface="휴먼모음T" panose="02030504000101010101" pitchFamily="18" charset="-127"/>
+              </a:rPr>
+              <a:t>, CLT</a:t>
+            </a:r>
+            <a:r>
+              <a:rPr lang="ko-KR" altLang="en-US" sz="1600" dirty="0">
+                <a:latin typeface="휴먼모음T" panose="02030504000101010101" pitchFamily="18" charset="-127"/>
+                <a:ea typeface="휴먼모음T" panose="02030504000101010101" pitchFamily="18" charset="-127"/>
+              </a:rPr>
+              <a:t>없이는 </a:t>
+            </a:r>
+            <a:r>
+              <a:rPr lang="en-US" altLang="ko-KR" sz="1600" dirty="0">
+                <a:latin typeface="휴먼모음T" panose="02030504000101010101" pitchFamily="18" charset="-127"/>
+                <a:ea typeface="휴먼모음T" panose="02030504000101010101" pitchFamily="18" charset="-127"/>
+              </a:rPr>
+              <a:t>mini</a:t>
+            </a:r>
+            <a:r>
+              <a:rPr lang="ko-KR" altLang="en-US" sz="1600" dirty="0">
+                <a:latin typeface="휴먼모음T" panose="02030504000101010101" pitchFamily="18" charset="-127"/>
+                <a:ea typeface="휴먼모음T" panose="02030504000101010101" pitchFamily="18" charset="-127"/>
+              </a:rPr>
+              <a:t> </a:t>
+            </a:r>
+            <a:r>
+              <a:rPr lang="en-US" altLang="ko-KR" sz="1600" dirty="0">
+                <a:latin typeface="휴먼모음T" panose="02030504000101010101" pitchFamily="18" charset="-127"/>
+                <a:ea typeface="휴먼모음T" panose="02030504000101010101" pitchFamily="18" charset="-127"/>
+              </a:rPr>
+              <a:t>batch </a:t>
+            </a:r>
+            <a:r>
+              <a:rPr lang="ko-KR" altLang="en-US" sz="1600" dirty="0">
+                <a:latin typeface="휴먼모음T" panose="02030504000101010101" pitchFamily="18" charset="-127"/>
+                <a:ea typeface="휴먼모음T" panose="02030504000101010101" pitchFamily="18" charset="-127"/>
+              </a:rPr>
+              <a:t>도 없음</a:t>
+            </a:r>
+            <a:endParaRPr lang="en-US" altLang="ko-KR" dirty="0">
+              <a:latin typeface="휴먼모음T" panose="02030504000101010101" pitchFamily="18" charset="-127"/>
+              <a:ea typeface="휴먼모음T" panose="02030504000101010101" pitchFamily="18" charset="-127"/>
+            </a:endParaRPr>
+          </a:p>
+          <a:p>
+            <a:pPr marL="285750" indent="-285750">
+              <a:lnSpc>
+                <a:spcPct val="150000"/>
+              </a:lnSpc>
+              <a:buFont typeface="Wingdings" panose="05000000000000000000" pitchFamily="2" charset="2"/>
+              <a:buChar char="v"/>
+            </a:pPr>
+            <a:r>
+              <a:rPr lang="ko-KR" altLang="en-US" dirty="0">
+                <a:latin typeface="휴먼모음T" panose="02030504000101010101" pitchFamily="18" charset="-127"/>
+                <a:ea typeface="휴먼모음T" panose="02030504000101010101" pitchFamily="18" charset="-127"/>
+              </a:rPr>
+              <a:t>교차검증을 통한 모델의 평가</a:t>
+            </a:r>
+            <a:endParaRPr lang="en-US" altLang="ko-KR" dirty="0">
+              <a:latin typeface="휴먼모음T" panose="02030504000101010101" pitchFamily="18" charset="-127"/>
+              <a:ea typeface="휴먼모음T" panose="02030504000101010101" pitchFamily="18" charset="-127"/>
+            </a:endParaRPr>
+          </a:p>
+          <a:p>
+            <a:pPr marL="742950" lvl="1" indent="-285750">
+              <a:lnSpc>
+                <a:spcPct val="150000"/>
+              </a:lnSpc>
+              <a:buFont typeface="Wingdings" panose="05000000000000000000" pitchFamily="2" charset="2"/>
+              <a:buChar char="v"/>
+            </a:pPr>
+            <a:r>
+              <a:rPr lang="ko-KR" altLang="en-US" sz="1600" dirty="0">
+                <a:latin typeface="휴먼모음T" panose="02030504000101010101" pitchFamily="18" charset="-127"/>
+                <a:ea typeface="휴먼모음T" panose="02030504000101010101" pitchFamily="18" charset="-127"/>
+              </a:rPr>
+              <a:t>평균 </a:t>
+            </a:r>
+            <a:r>
+              <a:rPr lang="en-US" altLang="ko-KR" sz="1600" dirty="0">
+                <a:latin typeface="휴먼모음T" panose="02030504000101010101" pitchFamily="18" charset="-127"/>
+                <a:ea typeface="휴먼모음T" panose="02030504000101010101" pitchFamily="18" charset="-127"/>
+              </a:rPr>
+              <a:t>accuracy/loss, </a:t>
+            </a:r>
+            <a:r>
+              <a:rPr lang="ko-KR" altLang="en-US" sz="1600" dirty="0">
+                <a:latin typeface="휴먼모음T" panose="02030504000101010101" pitchFamily="18" charset="-127"/>
+                <a:ea typeface="휴먼모음T" panose="02030504000101010101" pitchFamily="18" charset="-127"/>
+              </a:rPr>
+              <a:t>교차검증 평균 등 </a:t>
+            </a:r>
+            <a:r>
+              <a:rPr lang="en-US" altLang="ko-KR" sz="1600" dirty="0">
+                <a:latin typeface="휴먼모음T" panose="02030504000101010101" pitchFamily="18" charset="-127"/>
+                <a:ea typeface="휴먼모음T" panose="02030504000101010101" pitchFamily="18" charset="-127"/>
+              </a:rPr>
+              <a:t>CLT </a:t>
+            </a:r>
+            <a:r>
+              <a:rPr lang="ko-KR" altLang="en-US" sz="1600" dirty="0">
+                <a:latin typeface="휴먼모음T" panose="02030504000101010101" pitchFamily="18" charset="-127"/>
+                <a:ea typeface="휴먼모음T" panose="02030504000101010101" pitchFamily="18" charset="-127"/>
+              </a:rPr>
+              <a:t>적용으로 이  평균들은 → 정규분포 근사</a:t>
+            </a:r>
+            <a:r>
+              <a:rPr lang="en-US" altLang="ko-KR" sz="1600" dirty="0">
+                <a:latin typeface="휴먼모음T" panose="02030504000101010101" pitchFamily="18" charset="-127"/>
+                <a:ea typeface="휴먼모음T" panose="02030504000101010101" pitchFamily="18" charset="-127"/>
+              </a:rPr>
+              <a:t> </a:t>
+            </a:r>
+            <a:r>
+              <a:rPr lang="ko-KR" altLang="en-US" sz="1600" dirty="0">
+                <a:latin typeface="휴먼모음T" panose="02030504000101010101" pitchFamily="18" charset="-127"/>
+                <a:ea typeface="휴먼모음T" panose="02030504000101010101" pitchFamily="18" charset="-127"/>
+              </a:rPr>
+              <a:t>→ 신뢰구간</a:t>
+            </a:r>
+            <a:r>
+              <a:rPr lang="en-US" altLang="ko-KR" sz="1600" dirty="0">
+                <a:latin typeface="휴먼모음T" panose="02030504000101010101" pitchFamily="18" charset="-127"/>
+                <a:ea typeface="휴먼모음T" panose="02030504000101010101" pitchFamily="18" charset="-127"/>
+              </a:rPr>
+              <a:t> </a:t>
+            </a:r>
+            <a:r>
+              <a:rPr lang="ko-KR" altLang="en-US" sz="1600" dirty="0">
+                <a:latin typeface="휴먼모음T" panose="02030504000101010101" pitchFamily="18" charset="-127"/>
+                <a:ea typeface="휴먼모음T" panose="02030504000101010101" pitchFamily="18" charset="-127"/>
+              </a:rPr>
+              <a:t>→</a:t>
+            </a:r>
+            <a:r>
+              <a:rPr lang="en-US" altLang="ko-KR" sz="1600" dirty="0">
+                <a:latin typeface="휴먼모음T" panose="02030504000101010101" pitchFamily="18" charset="-127"/>
+                <a:ea typeface="휴먼모음T" panose="02030504000101010101" pitchFamily="18" charset="-127"/>
+              </a:rPr>
+              <a:t> </a:t>
+            </a:r>
+            <a:r>
+              <a:rPr lang="ko-KR" altLang="en-US" sz="1600" dirty="0">
+                <a:latin typeface="휴먼모음T" panose="02030504000101010101" pitchFamily="18" charset="-127"/>
+                <a:ea typeface="휴먼모음T" panose="02030504000101010101" pitchFamily="18" charset="-127"/>
+              </a:rPr>
+              <a:t>통계적 비교 가능</a:t>
+            </a:r>
+            <a:endParaRPr lang="en-US" altLang="ko-KR" dirty="0">
+              <a:latin typeface="휴먼모음T" panose="02030504000101010101" pitchFamily="18" charset="-127"/>
+              <a:ea typeface="휴먼모음T" panose="02030504000101010101" pitchFamily="18" charset="-127"/>
+            </a:endParaRPr>
+          </a:p>
+          <a:p>
+            <a:pPr marL="285750" indent="-285750">
+              <a:lnSpc>
+                <a:spcPct val="150000"/>
+              </a:lnSpc>
+              <a:buFont typeface="Wingdings" panose="05000000000000000000" pitchFamily="2" charset="2"/>
+              <a:buChar char="v"/>
+            </a:pPr>
+            <a:r>
+              <a:rPr lang="en-US" altLang="ko-KR" dirty="0">
+                <a:latin typeface="휴먼모음T" panose="02030504000101010101" pitchFamily="18" charset="-127"/>
+                <a:ea typeface="휴먼모음T" panose="02030504000101010101" pitchFamily="18" charset="-127"/>
+              </a:rPr>
+              <a:t>A/B </a:t>
+            </a:r>
+            <a:r>
+              <a:rPr lang="ko-KR" altLang="en-US" dirty="0">
+                <a:latin typeface="휴먼모음T" panose="02030504000101010101" pitchFamily="18" charset="-127"/>
+                <a:ea typeface="휴먼모음T" panose="02030504000101010101" pitchFamily="18" charset="-127"/>
+              </a:rPr>
+              <a:t>테스트와 실험 설계의 핵심</a:t>
+            </a:r>
+            <a:endParaRPr lang="en-US" altLang="ko-KR" dirty="0">
+              <a:latin typeface="휴먼모음T" panose="02030504000101010101" pitchFamily="18" charset="-127"/>
+              <a:ea typeface="휴먼모음T" panose="02030504000101010101" pitchFamily="18" charset="-127"/>
+            </a:endParaRPr>
+          </a:p>
+          <a:p>
+            <a:pPr marL="742950" lvl="1" indent="-285750">
+              <a:lnSpc>
+                <a:spcPct val="150000"/>
+              </a:lnSpc>
+              <a:buFont typeface="Wingdings" panose="05000000000000000000" pitchFamily="2" charset="2"/>
+              <a:buChar char="v"/>
+            </a:pPr>
+            <a:r>
+              <a:rPr lang="ko-KR" altLang="en-US" sz="1600" dirty="0">
+                <a:latin typeface="휴먼모음T" panose="02030504000101010101" pitchFamily="18" charset="-127"/>
+                <a:ea typeface="휴먼모음T" panose="02030504000101010101" pitchFamily="18" charset="-127"/>
+              </a:rPr>
+              <a:t>광고 효과 비교</a:t>
+            </a:r>
+            <a:r>
+              <a:rPr lang="en-US" altLang="ko-KR" sz="1600" dirty="0">
+                <a:latin typeface="휴먼모음T" panose="02030504000101010101" pitchFamily="18" charset="-127"/>
+                <a:ea typeface="휴먼모음T" panose="02030504000101010101" pitchFamily="18" charset="-127"/>
+              </a:rPr>
+              <a:t>, </a:t>
+            </a:r>
+            <a:r>
+              <a:rPr lang="ko-KR" altLang="en-US" sz="1600" dirty="0">
+                <a:latin typeface="휴먼모음T" panose="02030504000101010101" pitchFamily="18" charset="-127"/>
+                <a:ea typeface="휴먼모음T" panose="02030504000101010101" pitchFamily="18" charset="-127"/>
+              </a:rPr>
+              <a:t>추천 알고리즘 비교</a:t>
+            </a:r>
+            <a:r>
+              <a:rPr lang="en-US" altLang="ko-KR" sz="1600" dirty="0">
+                <a:latin typeface="휴먼모음T" panose="02030504000101010101" pitchFamily="18" charset="-127"/>
+                <a:ea typeface="휴먼모음T" panose="02030504000101010101" pitchFamily="18" charset="-127"/>
+              </a:rPr>
+              <a:t>, UI </a:t>
+            </a:r>
+            <a:r>
+              <a:rPr lang="ko-KR" altLang="en-US" sz="1600" dirty="0">
+                <a:latin typeface="휴먼모음T" panose="02030504000101010101" pitchFamily="18" charset="-127"/>
+                <a:ea typeface="휴먼모음T" panose="02030504000101010101" pitchFamily="18" charset="-127"/>
+              </a:rPr>
+              <a:t>개선 효과 측정  등 전부 평균 비교 문제로 </a:t>
+            </a:r>
+            <a:r>
+              <a:rPr lang="en-US" altLang="ko-KR" sz="1600" dirty="0">
+                <a:latin typeface="휴먼모음T" panose="02030504000101010101" pitchFamily="18" charset="-127"/>
+                <a:ea typeface="휴먼모음T" panose="02030504000101010101" pitchFamily="18" charset="-127"/>
+              </a:rPr>
+              <a:t>CLT </a:t>
+            </a:r>
+            <a:r>
+              <a:rPr lang="ko-KR" altLang="en-US" sz="1600" dirty="0">
+                <a:latin typeface="휴먼모음T" panose="02030504000101010101" pitchFamily="18" charset="-127"/>
+                <a:ea typeface="휴먼모음T" panose="02030504000101010101" pitchFamily="18" charset="-127"/>
+              </a:rPr>
+              <a:t>덕분에</a:t>
+            </a:r>
+            <a:r>
+              <a:rPr lang="en-US" altLang="ko-KR" sz="1600" dirty="0">
+                <a:latin typeface="휴먼모음T" panose="02030504000101010101" pitchFamily="18" charset="-127"/>
+                <a:ea typeface="휴먼모음T" panose="02030504000101010101" pitchFamily="18" charset="-127"/>
+              </a:rPr>
+              <a:t> </a:t>
+            </a:r>
+            <a:r>
+              <a:rPr lang="ko-KR" altLang="en-US" sz="1600" dirty="0">
+                <a:latin typeface="휴먼모음T" panose="02030504000101010101" pitchFamily="18" charset="-127"/>
+                <a:ea typeface="휴먼모음T" panose="02030504000101010101" pitchFamily="18" charset="-127"/>
+              </a:rPr>
+              <a:t>두 평균 차이 → 정규분포 근사 → </a:t>
+            </a:r>
+            <a:r>
+              <a:rPr lang="en-US" altLang="ko-KR" sz="1600" dirty="0">
+                <a:latin typeface="휴먼모음T" panose="02030504000101010101" pitchFamily="18" charset="-127"/>
+                <a:ea typeface="휴먼모음T" panose="02030504000101010101" pitchFamily="18" charset="-127"/>
+              </a:rPr>
+              <a:t>p-value </a:t>
+            </a:r>
+            <a:r>
+              <a:rPr lang="ko-KR" altLang="en-US" sz="1600" dirty="0">
+                <a:latin typeface="휴먼모음T" panose="02030504000101010101" pitchFamily="18" charset="-127"/>
+                <a:ea typeface="휴먼모음T" panose="02030504000101010101" pitchFamily="18" charset="-127"/>
+              </a:rPr>
+              <a:t>계산 가능</a:t>
+            </a:r>
+            <a:r>
+              <a:rPr lang="ko-KR" altLang="en-US" dirty="0">
+                <a:latin typeface="휴먼모음T" panose="02030504000101010101" pitchFamily="18" charset="-127"/>
+                <a:ea typeface="휴먼모음T" panose="02030504000101010101" pitchFamily="18" charset="-127"/>
+              </a:rPr>
+              <a:t> </a:t>
+            </a:r>
+            <a:endParaRPr lang="en-US" altLang="ko-KR" sz="2000" dirty="0">
+              <a:latin typeface="휴먼모음T" panose="02030504000101010101" pitchFamily="18" charset="-127"/>
+              <a:ea typeface="휴먼모음T" panose="02030504000101010101" pitchFamily="18" charset="-127"/>
+            </a:endParaRPr>
+          </a:p>
+        </p:txBody>
+      </p:sp>
+      <p:sp>
+        <p:nvSpPr>
+          <p:cNvPr id="9" name="TextBox 8">
+            <a:extLst>
+              <a:ext uri="{FF2B5EF4-FFF2-40B4-BE49-F238E27FC236}">
+                <a16:creationId xmlns:a16="http://schemas.microsoft.com/office/drawing/2014/main" id="{185A9784-515E-A3E4-8F67-F24BA80B28DC}"/>
+              </a:ext>
+            </a:extLst>
+          </p:cNvPr>
+          <p:cNvSpPr txBox="1"/>
+          <p:nvPr/>
+        </p:nvSpPr>
+        <p:spPr>
+          <a:xfrm>
+            <a:off x="117748" y="260648"/>
+            <a:ext cx="2592288" cy="584775"/>
+          </a:xfrm>
+          <a:prstGeom prst="rect">
+            <a:avLst/>
+          </a:prstGeom>
+          <a:noFill/>
+        </p:spPr>
+        <p:txBody>
+          <a:bodyPr wrap="square" rtlCol="0">
+            <a:spAutoFit/>
+          </a:bodyPr>
+          <a:lstStyle/>
+          <a:p>
+            <a:r>
+              <a:rPr lang="ko-KR" altLang="en-US" sz="3200" b="1"/>
+              <a:t>문제 풀이</a:t>
+            </a:r>
+          </a:p>
+        </p:txBody>
+      </p:sp>
+      <p:sp>
+        <p:nvSpPr>
+          <p:cNvPr id="5" name="TextBox 4">
+            <a:extLst>
+              <a:ext uri="{FF2B5EF4-FFF2-40B4-BE49-F238E27FC236}">
+                <a16:creationId xmlns:a16="http://schemas.microsoft.com/office/drawing/2014/main" id="{52039815-B66C-C01C-F725-1707E5711FCB}"/>
+              </a:ext>
+            </a:extLst>
+          </p:cNvPr>
+          <p:cNvSpPr txBox="1"/>
+          <p:nvPr/>
+        </p:nvSpPr>
+        <p:spPr>
+          <a:xfrm>
+            <a:off x="549796" y="858989"/>
+            <a:ext cx="11377264" cy="970843"/>
+          </a:xfrm>
+          <a:prstGeom prst="rect">
+            <a:avLst/>
+          </a:prstGeom>
+          <a:noFill/>
+        </p:spPr>
+        <p:txBody>
+          <a:bodyPr wrap="square">
+            <a:spAutoFit/>
+          </a:bodyPr>
+          <a:lstStyle/>
+          <a:p>
+            <a:pPr marL="285750" indent="-285750">
+              <a:lnSpc>
+                <a:spcPct val="150000"/>
+              </a:lnSpc>
+              <a:buFont typeface="Wingdings" panose="05000000000000000000" pitchFamily="2" charset="2"/>
+              <a:buChar char="v"/>
+            </a:pPr>
+            <a:r>
+              <a:rPr lang="ko-KR" altLang="en-US" sz="2000" dirty="0">
+                <a:latin typeface="휴먼모음T" panose="02030504000101010101" pitchFamily="18" charset="-127"/>
+                <a:ea typeface="휴먼모음T" panose="02030504000101010101" pitchFamily="18" charset="-127"/>
+              </a:rPr>
+              <a:t>중심극한정리</a:t>
+            </a:r>
+            <a:r>
+              <a:rPr lang="en-US" altLang="ko-KR" sz="2000" dirty="0">
+                <a:latin typeface="휴먼모음T" panose="02030504000101010101" pitchFamily="18" charset="-127"/>
+                <a:ea typeface="휴먼모음T" panose="02030504000101010101" pitchFamily="18" charset="-127"/>
+              </a:rPr>
+              <a:t>(</a:t>
+            </a:r>
+            <a:r>
+              <a:rPr lang="ko-KR" altLang="en-US" sz="2000" dirty="0">
+                <a:latin typeface="휴먼모음T" panose="02030504000101010101" pitchFamily="18" charset="-127"/>
+                <a:ea typeface="휴먼모음T" panose="02030504000101010101" pitchFamily="18" charset="-127"/>
+              </a:rPr>
+              <a:t>데이터는 불규칙하지만</a:t>
+            </a:r>
+            <a:r>
+              <a:rPr lang="en-US" altLang="ko-KR" sz="2000" dirty="0">
+                <a:latin typeface="휴먼모음T" panose="02030504000101010101" pitchFamily="18" charset="-127"/>
+                <a:ea typeface="휴먼모음T" panose="02030504000101010101" pitchFamily="18" charset="-127"/>
+              </a:rPr>
+              <a:t>, </a:t>
+            </a:r>
+            <a:r>
+              <a:rPr lang="ko-KR" altLang="en-US" sz="2000" dirty="0">
+                <a:latin typeface="휴먼모음T" panose="02030504000101010101" pitchFamily="18" charset="-127"/>
+                <a:ea typeface="휴먼모음T" panose="02030504000101010101" pitchFamily="18" charset="-127"/>
+              </a:rPr>
+              <a:t>평균은 예측 가능하다 → 그래서 학습이 가능하다</a:t>
+            </a:r>
+            <a:r>
+              <a:rPr lang="en-US" altLang="ko-KR" sz="2000" dirty="0">
+                <a:latin typeface="휴먼모음T" panose="02030504000101010101" pitchFamily="18" charset="-127"/>
+                <a:ea typeface="휴먼모음T" panose="02030504000101010101" pitchFamily="18" charset="-127"/>
+              </a:rPr>
+              <a:t>)</a:t>
+            </a:r>
+            <a:r>
+              <a:rPr lang="ko-KR" altLang="en-US" sz="2000" dirty="0">
+                <a:latin typeface="휴먼모음T" panose="02030504000101010101" pitchFamily="18" charset="-127"/>
+                <a:ea typeface="휴먼모음T" panose="02030504000101010101" pitchFamily="18" charset="-127"/>
+              </a:rPr>
+              <a:t>가 </a:t>
+            </a:r>
+            <a:r>
+              <a:rPr lang="ko-KR" altLang="en-US" sz="2000" dirty="0" err="1">
+                <a:latin typeface="휴먼모음T" panose="02030504000101010101" pitchFamily="18" charset="-127"/>
+                <a:ea typeface="휴먼모음T" panose="02030504000101010101" pitchFamily="18" charset="-127"/>
+              </a:rPr>
+              <a:t>머신러닝에</a:t>
+            </a:r>
+            <a:r>
+              <a:rPr lang="ko-KR" altLang="en-US" sz="2000" dirty="0">
+                <a:latin typeface="휴먼모음T" panose="02030504000101010101" pitchFamily="18" charset="-127"/>
+                <a:ea typeface="휴먼모음T" panose="02030504000101010101" pitchFamily="18" charset="-127"/>
+              </a:rPr>
+              <a:t> 접목하는 내용을 모의실험으로 파이썬 코드로 제시하라</a:t>
+            </a:r>
+            <a:endParaRPr lang="en-US" altLang="ko-KR" sz="2000" dirty="0">
+              <a:latin typeface="휴먼모음T" panose="02030504000101010101" pitchFamily="18" charset="-127"/>
+              <a:ea typeface="휴먼모음T" panose="02030504000101010101" pitchFamily="18" charset="-127"/>
+            </a:endParaRPr>
+          </a:p>
+        </p:txBody>
+      </p:sp>
+    </p:spTree>
+    <p:extLst>
+      <p:ext uri="{BB962C8B-B14F-4D97-AF65-F5344CB8AC3E}">
+        <p14:creationId xmlns:p14="http://schemas.microsoft.com/office/powerpoint/2010/main" val="2559646205"/>
+      </p:ext>
+    </p:extLst>
+  </p:cSld>
+  <p:clrMapOvr>
+    <a:masterClrMapping/>
+  </p:clrMapOvr>
+  <mc:AlternateContent xmlns:mc="http://schemas.openxmlformats.org/markup-compatibility/2006" xmlns:p14="http://schemas.microsoft.com/office/powerpoint/2010/main">
+    <mc:Choice Requires="p14">
+      <p:transition spd="med" p14:dur="700">
+        <p:fade/>
+      </p:transition>
+    </mc:Choice>
+    <mc:Fallback xmlns="">
+      <p:transition spd="med">
+        <p:fade/>
+      </p:transition>
+    </mc:Fallback>
+  </mc:AlternateContent>
+</p:sld>
+</file>
+
+<file path=ppt/slides/slide12.xml><?xml version="1.0" encoding="utf-8"?>
+<p:sld xmlns:a="http://schemas.openxmlformats.org/drawingml/2006/main" xmlns:r="http://schemas.openxmlformats.org/officeDocument/2006/relationships" xmlns:p="http://schemas.openxmlformats.org/presentationml/2006/main">
+  <p:cSld>
+    <p:spTree>
+      <p:nvGrpSpPr>
+        <p:cNvPr id="1" name="">
+          <a:extLst>
+            <a:ext uri="{FF2B5EF4-FFF2-40B4-BE49-F238E27FC236}">
               <a16:creationId xmlns:a16="http://schemas.microsoft.com/office/drawing/2014/main" id="{9BBFE75F-6515-E02E-0A0F-4F2429757FE5}"/>
             </a:ext>
           </a:extLst>
@@ -6188,7 +6855,7 @@
             <a:pPr rtl="0"/>
             <a:fld id="{A3F31473-23EB-4724-8B59-FE6D21D89FA4}" type="slidenum">
               <a:rPr lang="en-US" altLang="ko-KR" noProof="0" smtClean="0"/>
-              <a:t>11</a:t>
+              <a:t>12</a:t>
             </a:fld>
             <a:endParaRPr lang="en-US" altLang="ko-KR" noProof="0" dirty="0"/>
           </a:p>
@@ -8483,7 +9150,7 @@
         <p:cNvPr id="1" name="">
           <a:extLst>
             <a:ext uri="{FF2B5EF4-FFF2-40B4-BE49-F238E27FC236}">
-              <a16:creationId xmlns:a16="http://schemas.microsoft.com/office/drawing/2014/main" id="{DA1C777C-D922-8895-688C-C5D8CB36E7A9}"/>
+              <a16:creationId xmlns:a16="http://schemas.microsoft.com/office/drawing/2014/main" id="{11EF696F-724F-26BD-9C71-E5EC7071092F}"/>
             </a:ext>
           </a:extLst>
         </p:cNvPr>
@@ -8503,7 +9170,7 @@
           <p:cNvPr id="2" name="슬라이드 번호 개체 틀 1">
             <a:extLst>
               <a:ext uri="{FF2B5EF4-FFF2-40B4-BE49-F238E27FC236}">
-                <a16:creationId xmlns:a16="http://schemas.microsoft.com/office/drawing/2014/main" id="{AEB2C61B-EEC0-7491-DD5B-4008A55D9FCA}"/>
+                <a16:creationId xmlns:a16="http://schemas.microsoft.com/office/drawing/2014/main" id="{B6626646-BEA0-FB3A-7822-5F9972BD64EE}"/>
               </a:ext>
             </a:extLst>
           </p:cNvPr>
@@ -8533,7 +9200,7 @@
           <p:cNvPr id="4" name="TextBox 3">
             <a:extLst>
               <a:ext uri="{FF2B5EF4-FFF2-40B4-BE49-F238E27FC236}">
-                <a16:creationId xmlns:a16="http://schemas.microsoft.com/office/drawing/2014/main" id="{B46F664B-D509-3189-2815-157CC6374EF1}"/>
+                <a16:creationId xmlns:a16="http://schemas.microsoft.com/office/drawing/2014/main" id="{B4456C07-5D3C-22AC-8A59-702C8C03FA3F}"/>
               </a:ext>
             </a:extLst>
           </p:cNvPr>
@@ -8543,7 +9210,7 @@
         <p:spPr>
           <a:xfrm>
             <a:off x="765820" y="1196752"/>
-            <a:ext cx="11233248" cy="2355838"/>
+            <a:ext cx="11233248" cy="2531783"/>
           </a:xfrm>
           <a:prstGeom prst="rect">
             <a:avLst/>
@@ -8569,173 +9236,30 @@
               <a:buChar char="v"/>
             </a:pPr>
             <a:r>
-              <a:rPr lang="ko-KR" altLang="en-US" sz="2000" dirty="0">
-                <a:latin typeface="휴먼모음T" panose="02030504000101010101" pitchFamily="18" charset="-127"/>
-                <a:ea typeface="휴먼모음T" panose="02030504000101010101" pitchFamily="18" charset="-127"/>
-              </a:rPr>
-              <a:t>한 학급에 </a:t>
-            </a:r>
-            <a:r>
-              <a:rPr lang="ko-KR" altLang="ko-KR" sz="2000" dirty="0">
-                <a:latin typeface="휴먼모음T" panose="02030504000101010101" pitchFamily="18" charset="-127"/>
-                <a:ea typeface="휴먼모음T" panose="02030504000101010101" pitchFamily="18" charset="-127"/>
-              </a:rPr>
-              <a:t>100</a:t>
-            </a:r>
-            <a:r>
-              <a:rPr lang="ko-KR" altLang="en-US" sz="2000" dirty="0">
-                <a:latin typeface="휴먼모음T" panose="02030504000101010101" pitchFamily="18" charset="-127"/>
-                <a:ea typeface="휴먼모음T" panose="02030504000101010101" pitchFamily="18" charset="-127"/>
-              </a:rPr>
-              <a:t>명</a:t>
-            </a:r>
-            <a:r>
-              <a:rPr lang="ko-KR" altLang="ko-KR" sz="2000" dirty="0">
-                <a:latin typeface="휴먼모음T" panose="02030504000101010101" pitchFamily="18" charset="-127"/>
-                <a:ea typeface="휴먼모음T" panose="02030504000101010101" pitchFamily="18" charset="-127"/>
-              </a:rPr>
-              <a:t>(</a:t>
-            </a:r>
-            <a:r>
-              <a:rPr lang="ko-KR" altLang="ko-KR" sz="2000" dirty="0" err="1">
-                <a:latin typeface="휴먼모음T" panose="02030504000101010101" pitchFamily="18" charset="-127"/>
-                <a:ea typeface="휴먼모음T" panose="02030504000101010101" pitchFamily="18" charset="-127"/>
+              <a:rPr lang="ko-KR" altLang="en-US" dirty="0">
+                <a:latin typeface="맑은 고딕" panose="020B0503020000020004" pitchFamily="50" charset="-127"/>
+                <a:ea typeface="맑은 고딕" panose="020B0503020000020004" pitchFamily="50" charset="-127"/>
+              </a:rPr>
+              <a:t>당신은 앞으로 인생에서 총 </a:t>
+            </a:r>
+            <a:r>
+              <a:rPr lang="en-US" altLang="ko-KR" dirty="0">
+                <a:latin typeface="맑은 고딕" panose="020B0503020000020004" pitchFamily="50" charset="-127"/>
+                <a:ea typeface="맑은 고딕" panose="020B0503020000020004" pitchFamily="50" charset="-127"/>
               </a:rPr>
               <a:t>N</a:t>
             </a:r>
             <a:r>
-              <a:rPr lang="ko-KR" altLang="ko-KR" sz="2000" dirty="0">
-                <a:latin typeface="휴먼모음T" panose="02030504000101010101" pitchFamily="18" charset="-127"/>
-                <a:ea typeface="휴먼모음T" panose="02030504000101010101" pitchFamily="18" charset="-127"/>
-              </a:rPr>
-              <a:t>=100)</a:t>
-            </a:r>
-            <a:r>
-              <a:rPr lang="ko-KR" altLang="en-US" sz="2000" dirty="0">
-                <a:latin typeface="휴먼모음T" panose="02030504000101010101" pitchFamily="18" charset="-127"/>
-                <a:ea typeface="휴먼모음T" panose="02030504000101010101" pitchFamily="18" charset="-127"/>
-              </a:rPr>
-              <a:t>이 있는 반을 </a:t>
-            </a:r>
-            <a:r>
-              <a:rPr lang="ko-KR" altLang="ko-KR" sz="2000" dirty="0">
-                <a:latin typeface="휴먼모음T" panose="02030504000101010101" pitchFamily="18" charset="-127"/>
-                <a:ea typeface="휴먼모음T" panose="02030504000101010101" pitchFamily="18" charset="-127"/>
-              </a:rPr>
-              <a:t>상상해 보세요. </a:t>
-            </a:r>
-            <a:r>
-              <a:rPr lang="ko-KR" altLang="en-US" sz="2000" dirty="0">
-                <a:latin typeface="휴먼모음T" panose="02030504000101010101" pitchFamily="18" charset="-127"/>
-                <a:ea typeface="휴먼모음T" panose="02030504000101010101" pitchFamily="18" charset="-127"/>
-              </a:rPr>
-              <a:t>선생님이 무작위로 </a:t>
-            </a:r>
-            <a:r>
-              <a:rPr lang="en-US" altLang="ko-KR" sz="2000" dirty="0">
-                <a:latin typeface="휴먼모음T" panose="02030504000101010101" pitchFamily="18" charset="-127"/>
-                <a:ea typeface="휴먼모음T" panose="02030504000101010101" pitchFamily="18" charset="-127"/>
-              </a:rPr>
-              <a:t>1 </a:t>
-            </a:r>
-            <a:r>
-              <a:rPr lang="ko-KR" altLang="en-US" sz="2000" dirty="0">
-                <a:latin typeface="휴먼모음T" panose="02030504000101010101" pitchFamily="18" charset="-127"/>
-                <a:ea typeface="휴먼모음T" panose="02030504000101010101" pitchFamily="18" charset="-127"/>
-              </a:rPr>
-              <a:t>명을 </a:t>
-            </a:r>
-            <a:r>
-              <a:rPr lang="ko-KR" altLang="ko-KR" sz="2000" dirty="0">
-                <a:latin typeface="휴먼모음T" panose="02030504000101010101" pitchFamily="18" charset="-127"/>
-                <a:ea typeface="휴먼모음T" panose="02030504000101010101" pitchFamily="18" charset="-127"/>
-              </a:rPr>
-              <a:t>뽑고</a:t>
-            </a:r>
-            <a:r>
-              <a:rPr lang="en-US" altLang="ko-KR" sz="2000" dirty="0">
-                <a:latin typeface="휴먼모음T" panose="02030504000101010101" pitchFamily="18" charset="-127"/>
-                <a:ea typeface="휴먼모음T" panose="02030504000101010101" pitchFamily="18" charset="-127"/>
-              </a:rPr>
-              <a:t> </a:t>
-            </a:r>
-            <a:r>
-              <a:rPr lang="ko-KR" altLang="en-US" sz="2000" dirty="0">
-                <a:latin typeface="휴먼모음T" panose="02030504000101010101" pitchFamily="18" charset="-127"/>
-                <a:ea typeface="휴먼모음T" panose="02030504000101010101" pitchFamily="18" charset="-127"/>
-              </a:rPr>
-              <a:t>선물을 주고</a:t>
-            </a:r>
-            <a:r>
-              <a:rPr lang="ko-KR" altLang="ko-KR" sz="2000" dirty="0">
-                <a:latin typeface="휴먼모음T" panose="02030504000101010101" pitchFamily="18" charset="-127"/>
-                <a:ea typeface="휴먼모음T" panose="02030504000101010101" pitchFamily="18" charset="-127"/>
-              </a:rPr>
-              <a:t>, </a:t>
-            </a:r>
-            <a:r>
-              <a:rPr lang="ko-KR" altLang="en-US" sz="2000" dirty="0">
-                <a:latin typeface="휴먼모음T" panose="02030504000101010101" pitchFamily="18" charset="-127"/>
-                <a:ea typeface="휴먼모음T" panose="02030504000101010101" pitchFamily="18" charset="-127"/>
-              </a:rPr>
-              <a:t>다시 전체 </a:t>
-            </a:r>
-            <a:r>
-              <a:rPr lang="en-US" altLang="ko-KR" sz="2000" dirty="0">
-                <a:latin typeface="휴먼모음T" panose="02030504000101010101" pitchFamily="18" charset="-127"/>
-                <a:ea typeface="휴먼모음T" panose="02030504000101010101" pitchFamily="18" charset="-127"/>
-              </a:rPr>
-              <a:t>100</a:t>
-            </a:r>
-            <a:r>
-              <a:rPr lang="ko-KR" altLang="en-US" sz="2000" dirty="0">
-                <a:latin typeface="휴먼모음T" panose="02030504000101010101" pitchFamily="18" charset="-127"/>
-                <a:ea typeface="휴먼모음T" panose="02030504000101010101" pitchFamily="18" charset="-127"/>
-              </a:rPr>
-              <a:t>명에서 </a:t>
-            </a:r>
-            <a:r>
-              <a:rPr lang="en-US" altLang="ko-KR" sz="2000" dirty="0">
-                <a:latin typeface="휴먼모음T" panose="02030504000101010101" pitchFamily="18" charset="-127"/>
-                <a:ea typeface="휴먼모음T" panose="02030504000101010101" pitchFamily="18" charset="-127"/>
-              </a:rPr>
-              <a:t>1</a:t>
-            </a:r>
-            <a:r>
-              <a:rPr lang="ko-KR" altLang="en-US" sz="2000" dirty="0">
-                <a:latin typeface="휴먼모음T" panose="02030504000101010101" pitchFamily="18" charset="-127"/>
-                <a:ea typeface="휴먼모음T" panose="02030504000101010101" pitchFamily="18" charset="-127"/>
-              </a:rPr>
-              <a:t>명을 뽑습니다</a:t>
-            </a:r>
-            <a:r>
-              <a:rPr lang="en-US" altLang="ko-KR" sz="2000" dirty="0">
-                <a:latin typeface="휴먼모음T" panose="02030504000101010101" pitchFamily="18" charset="-127"/>
-                <a:ea typeface="휴먼모음T" panose="02030504000101010101" pitchFamily="18" charset="-127"/>
-              </a:rPr>
-              <a:t>. </a:t>
-            </a:r>
-            <a:r>
-              <a:rPr lang="ko-KR" altLang="ko-KR" sz="2000" dirty="0">
-                <a:latin typeface="휴먼모음T" panose="02030504000101010101" pitchFamily="18" charset="-127"/>
-                <a:ea typeface="휴먼모음T" panose="02030504000101010101" pitchFamily="18" charset="-127"/>
-              </a:rPr>
-              <a:t>이 짓을 똑같이 100번 반복해서 </a:t>
-            </a:r>
-            <a:r>
-              <a:rPr lang="ko-KR" altLang="en-US" sz="2000" dirty="0">
-                <a:latin typeface="휴먼모음T" panose="02030504000101010101" pitchFamily="18" charset="-127"/>
-                <a:ea typeface="휴먼모음T" panose="02030504000101010101" pitchFamily="18" charset="-127"/>
-              </a:rPr>
-              <a:t>선물을 주게 될 경우 내가 선물을 못박을 확률은</a:t>
-            </a:r>
-            <a:r>
-              <a:rPr lang="en-US" altLang="ko-KR" sz="2000" dirty="0">
-                <a:latin typeface="휴먼모음T" panose="02030504000101010101" pitchFamily="18" charset="-127"/>
-                <a:ea typeface="휴먼모음T" panose="02030504000101010101" pitchFamily="18" charset="-127"/>
-              </a:rPr>
-              <a:t>?</a:t>
-            </a:r>
+              <a:rPr lang="ko-KR" altLang="en-US" dirty="0">
+                <a:latin typeface="맑은 고딕" panose="020B0503020000020004" pitchFamily="50" charset="-127"/>
+                <a:ea typeface="맑은 고딕" panose="020B0503020000020004" pitchFamily="50" charset="-127"/>
+              </a:rPr>
+              <a:t>명의 잠재적 파트너를 만날 수 있다고 가정</a:t>
+            </a:r>
+            <a:endParaRPr lang="en-US" altLang="ko-KR" dirty="0">
+              <a:latin typeface="맑은 고딕" panose="020B0503020000020004" pitchFamily="50" charset="-127"/>
+              <a:ea typeface="맑은 고딕" panose="020B0503020000020004" pitchFamily="50" charset="-127"/>
+            </a:endParaRPr>
           </a:p>
           <a:p>
             <a:pPr marL="285750" indent="-285750">
@@ -8746,26 +9270,112 @@
               <a:buChar char="v"/>
             </a:pPr>
             <a:r>
-              <a:rPr lang="en-US" altLang="ko-KR" sz="2000" dirty="0">
-                <a:latin typeface="휴먼모음T" panose="02030504000101010101" pitchFamily="18" charset="-127"/>
-                <a:ea typeface="휴먼모음T" panose="02030504000101010101" pitchFamily="18" charset="-127"/>
-              </a:rPr>
-              <a:t>200</a:t>
-            </a:r>
-            <a:r>
-              <a:rPr lang="ko-KR" altLang="en-US" sz="2000" dirty="0">
-                <a:latin typeface="휴먼모음T" panose="02030504000101010101" pitchFamily="18" charset="-127"/>
-                <a:ea typeface="휴먼모음T" panose="02030504000101010101" pitchFamily="18" charset="-127"/>
-              </a:rPr>
-              <a:t>번을 반복했는데 내가 못 받을 확률은</a:t>
-            </a:r>
-            <a:r>
-              <a:rPr lang="en-US" altLang="ko-KR" sz="2000" dirty="0">
-                <a:latin typeface="휴먼모음T" panose="02030504000101010101" pitchFamily="18" charset="-127"/>
-                <a:ea typeface="휴먼모음T" panose="02030504000101010101" pitchFamily="18" charset="-127"/>
-              </a:rPr>
-              <a:t>?</a:t>
-            </a:r>
+              <a:rPr lang="ko-KR" altLang="en-US" dirty="0">
+                <a:latin typeface="맑은 고딕" panose="020B0503020000020004" pitchFamily="50" charset="-127"/>
+                <a:ea typeface="맑은 고딕" panose="020B0503020000020004" pitchFamily="50" charset="-127"/>
+              </a:rPr>
+              <a:t>당신의 목표는 그중 가장 뛰어난 사람</a:t>
+            </a:r>
+            <a:r>
+              <a:rPr lang="en-US" altLang="ko-KR" dirty="0">
+                <a:latin typeface="맑은 고딕" panose="020B0503020000020004" pitchFamily="50" charset="-127"/>
+                <a:ea typeface="맑은 고딕" panose="020B0503020000020004" pitchFamily="50" charset="-127"/>
+              </a:rPr>
+              <a:t>(X)</a:t>
+            </a:r>
+            <a:r>
+              <a:rPr lang="ko-KR" altLang="en-US" dirty="0">
+                <a:latin typeface="맑은 고딕" panose="020B0503020000020004" pitchFamily="50" charset="-127"/>
+                <a:ea typeface="맑은 고딕" panose="020B0503020000020004" pitchFamily="50" charset="-127"/>
+              </a:rPr>
+              <a:t>과 매칭되는 것이며</a:t>
+            </a:r>
+            <a:r>
+              <a:rPr lang="en-US" altLang="ko-KR" dirty="0">
+                <a:latin typeface="맑은 고딕" panose="020B0503020000020004" pitchFamily="50" charset="-127"/>
+                <a:ea typeface="맑은 고딕" panose="020B0503020000020004" pitchFamily="50" charset="-127"/>
+              </a:rPr>
+              <a:t> </a:t>
+            </a:r>
+            <a:r>
+              <a:rPr lang="ko-KR" altLang="en-US" dirty="0">
+                <a:latin typeface="맑은 고딕" panose="020B0503020000020004" pitchFamily="50" charset="-127"/>
+                <a:ea typeface="맑은 고딕" panose="020B0503020000020004" pitchFamily="50" charset="-127"/>
+              </a:rPr>
+              <a:t>단</a:t>
+            </a:r>
+            <a:r>
+              <a:rPr lang="en-US" altLang="ko-KR" dirty="0">
+                <a:latin typeface="맑은 고딕" panose="020B0503020000020004" pitchFamily="50" charset="-127"/>
+                <a:ea typeface="맑은 고딕" panose="020B0503020000020004" pitchFamily="50" charset="-127"/>
+              </a:rPr>
+              <a:t>, </a:t>
+            </a:r>
+            <a:r>
+              <a:rPr lang="ko-KR" altLang="en-US" dirty="0">
+                <a:latin typeface="맑은 고딕" panose="020B0503020000020004" pitchFamily="50" charset="-127"/>
+                <a:ea typeface="맑은 고딕" panose="020B0503020000020004" pitchFamily="50" charset="-127"/>
+              </a:rPr>
+              <a:t>아래의 조건</a:t>
+            </a:r>
+            <a:endParaRPr lang="en-US" altLang="ko-KR" dirty="0">
+              <a:latin typeface="맑은 고딕" panose="020B0503020000020004" pitchFamily="50" charset="-127"/>
+              <a:ea typeface="맑은 고딕" panose="020B0503020000020004" pitchFamily="50" charset="-127"/>
+            </a:endParaRPr>
+          </a:p>
+          <a:p>
+            <a:pPr marL="742950" lvl="1" indent="-285750">
+              <a:lnSpc>
+                <a:spcPct val="150000"/>
+              </a:lnSpc>
+              <a:buFont typeface="Wingdings" panose="05000000000000000000" pitchFamily="2" charset="2"/>
+              <a:buChar char="v"/>
+            </a:pPr>
+            <a:r>
+              <a:rPr lang="ko-KR" altLang="en-US" dirty="0">
+                <a:latin typeface="맑은 고딕" panose="020B0503020000020004" pitchFamily="50" charset="-127"/>
+                <a:ea typeface="맑은 고딕" panose="020B0503020000020004" pitchFamily="50" charset="-127"/>
+              </a:rPr>
+              <a:t>한 번 거절한 사람에게는 다시 돌아갈 수 없음</a:t>
+            </a:r>
+            <a:endParaRPr lang="en-US" altLang="ko-KR" dirty="0">
+              <a:latin typeface="맑은 고딕" panose="020B0503020000020004" pitchFamily="50" charset="-127"/>
+              <a:ea typeface="맑은 고딕" panose="020B0503020000020004" pitchFamily="50" charset="-127"/>
+            </a:endParaRPr>
+          </a:p>
+          <a:p>
+            <a:pPr marL="742950" lvl="1" indent="-285750">
+              <a:lnSpc>
+                <a:spcPct val="150000"/>
+              </a:lnSpc>
+              <a:buFont typeface="Wingdings" panose="05000000000000000000" pitchFamily="2" charset="2"/>
+              <a:buChar char="v"/>
+            </a:pPr>
+            <a:r>
+              <a:rPr lang="ko-KR" altLang="en-US" dirty="0">
+                <a:latin typeface="맑은 고딕" panose="020B0503020000020004" pitchFamily="50" charset="-127"/>
+                <a:ea typeface="맑은 고딕" panose="020B0503020000020004" pitchFamily="50" charset="-127"/>
+              </a:rPr>
+              <a:t>만나는 순서는 무작위이며</a:t>
+            </a:r>
+            <a:r>
+              <a:rPr lang="en-US" altLang="ko-KR" dirty="0">
+                <a:latin typeface="맑은 고딕" panose="020B0503020000020004" pitchFamily="50" charset="-127"/>
+                <a:ea typeface="맑은 고딕" panose="020B0503020000020004" pitchFamily="50" charset="-127"/>
+              </a:rPr>
+              <a:t>, </a:t>
+            </a:r>
+            <a:r>
+              <a:rPr lang="ko-KR" altLang="en-US" dirty="0">
+                <a:latin typeface="맑은 고딕" panose="020B0503020000020004" pitchFamily="50" charset="-127"/>
+                <a:ea typeface="맑은 고딕" panose="020B0503020000020004" pitchFamily="50" charset="-127"/>
+              </a:rPr>
+              <a:t>당신은 상대를 만날 때마다 점수를 매길 수 있음</a:t>
+            </a:r>
+            <a:endParaRPr lang="en-US" altLang="ko-KR" dirty="0">
+              <a:latin typeface="맑은 고딕" panose="020B0503020000020004" pitchFamily="50" charset="-127"/>
+              <a:ea typeface="맑은 고딕" panose="020B0503020000020004" pitchFamily="50" charset="-127"/>
+            </a:endParaRPr>
           </a:p>
           <a:p>
             <a:pPr marL="285750" indent="-285750">
@@ -8776,26 +9386,74 @@
               <a:buChar char="v"/>
             </a:pPr>
             <a:r>
-              <a:rPr lang="en-US" altLang="ko-KR" sz="2000" dirty="0">
-                <a:latin typeface="휴먼모음T" panose="02030504000101010101" pitchFamily="18" charset="-127"/>
-                <a:ea typeface="휴먼모음T" panose="02030504000101010101" pitchFamily="18" charset="-127"/>
-              </a:rPr>
-              <a:t>300</a:t>
-            </a:r>
-            <a:r>
-              <a:rPr lang="ko-KR" altLang="en-US" sz="2000" dirty="0">
-                <a:latin typeface="휴먼모음T" panose="02030504000101010101" pitchFamily="18" charset="-127"/>
-                <a:ea typeface="휴먼모음T" panose="02030504000101010101" pitchFamily="18" charset="-127"/>
-              </a:rPr>
-              <a:t>번을 반복했는데 내가 못 받을 확률은</a:t>
-            </a:r>
-            <a:r>
-              <a:rPr lang="en-US" altLang="ko-KR" sz="2000" dirty="0">
-                <a:latin typeface="휴먼모음T" panose="02030504000101010101" pitchFamily="18" charset="-127"/>
-                <a:ea typeface="휴먼모음T" panose="02030504000101010101" pitchFamily="18" charset="-127"/>
+              <a:rPr lang="ko-KR" altLang="en-US" dirty="0">
+                <a:latin typeface="맑은 고딕" panose="020B0503020000020004" pitchFamily="50" charset="-127"/>
+                <a:ea typeface="맑은 고딕" panose="020B0503020000020004" pitchFamily="50" charset="-127"/>
+              </a:rPr>
+              <a:t>가장 좋은 사람</a:t>
+            </a:r>
+            <a:r>
+              <a:rPr lang="en-US" altLang="ko-KR" dirty="0">
+                <a:latin typeface="맑은 고딕" panose="020B0503020000020004" pitchFamily="50" charset="-127"/>
+                <a:ea typeface="맑은 고딕" panose="020B0503020000020004" pitchFamily="50" charset="-127"/>
+              </a:rPr>
+              <a:t>(X)</a:t>
+            </a:r>
+            <a:r>
+              <a:rPr lang="ko-KR" altLang="en-US" dirty="0">
+                <a:latin typeface="맑은 고딕" panose="020B0503020000020004" pitchFamily="50" charset="-127"/>
+                <a:ea typeface="맑은 고딕" panose="020B0503020000020004" pitchFamily="50" charset="-127"/>
+              </a:rPr>
+              <a:t>을 선택할 확률을 최대화하려면</a:t>
+            </a:r>
+            <a:r>
+              <a:rPr lang="en-US" altLang="ko-KR" dirty="0">
+                <a:latin typeface="맑은 고딕" panose="020B0503020000020004" pitchFamily="50" charset="-127"/>
+                <a:ea typeface="맑은 고딕" panose="020B0503020000020004" pitchFamily="50" charset="-127"/>
+              </a:rPr>
+              <a:t>, </a:t>
+            </a:r>
+            <a:r>
+              <a:rPr lang="ko-KR" altLang="en-US" dirty="0">
+                <a:latin typeface="맑은 고딕" panose="020B0503020000020004" pitchFamily="50" charset="-127"/>
+                <a:ea typeface="맑은 고딕" panose="020B0503020000020004" pitchFamily="50" charset="-127"/>
+              </a:rPr>
+              <a:t>몇 번째 사람을 선책해야 하나요</a:t>
+            </a:r>
+            <a:r>
+              <a:rPr lang="en-US" altLang="ko-KR" dirty="0">
+                <a:latin typeface="맑은 고딕" panose="020B0503020000020004" pitchFamily="50" charset="-127"/>
+                <a:ea typeface="맑은 고딕" panose="020B0503020000020004" pitchFamily="50" charset="-127"/>
               </a:rPr>
               <a:t>?</a:t>
             </a:r>
+          </a:p>
+          <a:p>
+            <a:pPr marL="742950" lvl="1" indent="-285750">
+              <a:lnSpc>
+                <a:spcPct val="150000"/>
+              </a:lnSpc>
+              <a:buFont typeface="Wingdings" panose="05000000000000000000" pitchFamily="2" charset="2"/>
+              <a:buChar char="v"/>
+            </a:pPr>
+            <a:r>
+              <a:rPr lang="en-US" altLang="ko-KR" dirty="0">
+                <a:latin typeface="맑은 고딕" panose="020B0503020000020004" pitchFamily="50" charset="-127"/>
+                <a:ea typeface="맑은 고딕" panose="020B0503020000020004" pitchFamily="50" charset="-127"/>
+                <a:hlinkClick r:id="rId3">
+                  <a:extLst>
+                    <a:ext uri="{A12FA001-AC4F-418D-AE19-62706E023703}">
+                      <ahyp:hlinkClr xmlns:ahyp="http://schemas.microsoft.com/office/drawing/2018/hyperlinkcolor" val="tx"/>
+                    </a:ext>
+                  </a:extLst>
+                </a:hlinkClick>
+              </a:rPr>
+              <a:t>mathematical-dating</a:t>
+            </a:r>
+            <a:endParaRPr lang="en-US" altLang="ko-KR" dirty="0">
+              <a:latin typeface="맑은 고딕" panose="020B0503020000020004" pitchFamily="50" charset="-127"/>
+              <a:ea typeface="맑은 고딕" panose="020B0503020000020004" pitchFamily="50" charset="-127"/>
+            </a:endParaRPr>
           </a:p>
         </p:txBody>
       </p:sp>
@@ -8804,7 +9462,7 @@
           <p:cNvPr id="9" name="TextBox 8">
             <a:extLst>
               <a:ext uri="{FF2B5EF4-FFF2-40B4-BE49-F238E27FC236}">
-                <a16:creationId xmlns:a16="http://schemas.microsoft.com/office/drawing/2014/main" id="{1A89527C-5F15-5354-51AE-303E2EF56CBE}"/>
+                <a16:creationId xmlns:a16="http://schemas.microsoft.com/office/drawing/2014/main" id="{185BE9C9-E7C6-D55A-BC46-CD975C33457A}"/>
               </a:ext>
             </a:extLst>
           </p:cNvPr>
@@ -8834,10 +9492,40 @@
           </a:p>
         </p:txBody>
       </p:sp>
+      <p:pic>
+        <p:nvPicPr>
+          <p:cNvPr id="6" name="그림 5">
+            <a:extLst>
+              <a:ext uri="{FF2B5EF4-FFF2-40B4-BE49-F238E27FC236}">
+                <a16:creationId xmlns:a16="http://schemas.microsoft.com/office/drawing/2014/main" id="{BE0093E0-2B37-39B8-6DB9-925B18522DF0}"/>
+              </a:ext>
+            </a:extLst>
+          </p:cNvPr>
+          <p:cNvPicPr>
+            <a:picLocks noChangeAspect="1"/>
+          </p:cNvPicPr>
+          <p:nvPr/>
+        </p:nvPicPr>
+        <p:blipFill>
+          <a:blip r:embed="rId4"/>
+          <a:stretch>
+            <a:fillRect/>
+          </a:stretch>
+        </p:blipFill>
+        <p:spPr>
+          <a:xfrm>
+            <a:off x="780486" y="4204126"/>
+            <a:ext cx="3334215" cy="1676634"/>
+          </a:xfrm>
+          <a:prstGeom prst="rect">
+            <a:avLst/>
+          </a:prstGeom>
+        </p:spPr>
+      </p:pic>
     </p:spTree>
     <p:extLst>
       <p:ext uri="{BB962C8B-B14F-4D97-AF65-F5344CB8AC3E}">
-        <p14:creationId xmlns:p14="http://schemas.microsoft.com/office/powerpoint/2010/main" val="1127705894"/>
+        <p14:creationId xmlns:p14="http://schemas.microsoft.com/office/powerpoint/2010/main" val="2538778517"/>
       </p:ext>
     </p:extLst>
   </p:cSld>
@@ -8867,7 +9555,7 @@
         <p:cNvPr id="1" name="">
           <a:extLst>
             <a:ext uri="{FF2B5EF4-FFF2-40B4-BE49-F238E27FC236}">
-              <a16:creationId xmlns:a16="http://schemas.microsoft.com/office/drawing/2014/main" id="{FD863252-33CE-8BCC-AD7B-FF64CEC04133}"/>
+              <a16:creationId xmlns:a16="http://schemas.microsoft.com/office/drawing/2014/main" id="{DA1C777C-D922-8895-688C-C5D8CB36E7A9}"/>
             </a:ext>
           </a:extLst>
         </p:cNvPr>
@@ -8887,7 +9575,7 @@
           <p:cNvPr id="2" name="슬라이드 번호 개체 틀 1">
             <a:extLst>
               <a:ext uri="{FF2B5EF4-FFF2-40B4-BE49-F238E27FC236}">
-                <a16:creationId xmlns:a16="http://schemas.microsoft.com/office/drawing/2014/main" id="{92BE835A-B5F4-F995-40C3-C7E940E4052B}"/>
+                <a16:creationId xmlns:a16="http://schemas.microsoft.com/office/drawing/2014/main" id="{AEB2C61B-EEC0-7491-DD5B-4008A55D9FCA}"/>
               </a:ext>
             </a:extLst>
           </p:cNvPr>
@@ -8917,7 +9605,7 @@
           <p:cNvPr id="4" name="TextBox 3">
             <a:extLst>
               <a:ext uri="{FF2B5EF4-FFF2-40B4-BE49-F238E27FC236}">
-                <a16:creationId xmlns:a16="http://schemas.microsoft.com/office/drawing/2014/main" id="{4B91CA6F-D833-6140-6621-352A7531D611}"/>
+                <a16:creationId xmlns:a16="http://schemas.microsoft.com/office/drawing/2014/main" id="{B46F664B-D509-3189-2815-157CC6374EF1}"/>
               </a:ext>
             </a:extLst>
           </p:cNvPr>
@@ -8927,7 +9615,7 @@
         <p:spPr>
           <a:xfrm>
             <a:off x="765820" y="1196752"/>
-            <a:ext cx="11233248" cy="509178"/>
+            <a:ext cx="11233248" cy="2355838"/>
           </a:xfrm>
           <a:prstGeom prst="rect">
             <a:avLst/>
@@ -8957,21 +9645,221 @@
                 <a:latin typeface="휴먼모음T" panose="02030504000101010101" pitchFamily="18" charset="-127"/>
                 <a:ea typeface="휴먼모음T" panose="02030504000101010101" pitchFamily="18" charset="-127"/>
               </a:rPr>
-              <a:t>평생 미팅하는 상대방이 </a:t>
+              <a:t>한 학급에 </a:t>
+            </a:r>
+            <a:r>
+              <a:rPr lang="ko-KR" altLang="ko-KR" sz="2000" dirty="0">
+                <a:latin typeface="휴먼모음T" panose="02030504000101010101" pitchFamily="18" charset="-127"/>
+                <a:ea typeface="휴먼모음T" panose="02030504000101010101" pitchFamily="18" charset="-127"/>
+              </a:rPr>
+              <a:t>100</a:t>
+            </a:r>
+            <a:r>
+              <a:rPr lang="ko-KR" altLang="en-US" sz="2000" dirty="0">
+                <a:latin typeface="휴먼모음T" panose="02030504000101010101" pitchFamily="18" charset="-127"/>
+                <a:ea typeface="휴먼모음T" panose="02030504000101010101" pitchFamily="18" charset="-127"/>
+              </a:rPr>
+              <a:t>명</a:t>
+            </a:r>
+            <a:r>
+              <a:rPr lang="ko-KR" altLang="ko-KR" sz="2000" dirty="0">
+                <a:latin typeface="휴먼모음T" panose="02030504000101010101" pitchFamily="18" charset="-127"/>
+                <a:ea typeface="휴먼모음T" panose="02030504000101010101" pitchFamily="18" charset="-127"/>
+              </a:rPr>
+              <a:t>(</a:t>
+            </a:r>
+            <a:r>
+              <a:rPr lang="ko-KR" altLang="ko-KR" sz="2000" dirty="0" err="1">
+                <a:latin typeface="휴먼모음T" panose="02030504000101010101" pitchFamily="18" charset="-127"/>
+                <a:ea typeface="휴먼모음T" panose="02030504000101010101" pitchFamily="18" charset="-127"/>
+              </a:rPr>
+              <a:t>N</a:t>
+            </a:r>
+            <a:r>
+              <a:rPr lang="ko-KR" altLang="ko-KR" sz="2000" dirty="0">
+                <a:latin typeface="휴먼모음T" panose="02030504000101010101" pitchFamily="18" charset="-127"/>
+                <a:ea typeface="휴먼모음T" panose="02030504000101010101" pitchFamily="18" charset="-127"/>
+              </a:rPr>
+              <a:t>=100)</a:t>
+            </a:r>
+            <a:r>
+              <a:rPr lang="ko-KR" altLang="en-US" sz="2000" dirty="0">
+                <a:latin typeface="휴먼모음T" panose="02030504000101010101" pitchFamily="18" charset="-127"/>
+                <a:ea typeface="휴먼모음T" panose="02030504000101010101" pitchFamily="18" charset="-127"/>
+              </a:rPr>
+              <a:t>이 있는 반을 </a:t>
+            </a:r>
+            <a:r>
+              <a:rPr lang="ko-KR" altLang="ko-KR" sz="2000" dirty="0">
+                <a:latin typeface="휴먼모음T" panose="02030504000101010101" pitchFamily="18" charset="-127"/>
+                <a:ea typeface="휴먼모음T" panose="02030504000101010101" pitchFamily="18" charset="-127"/>
+              </a:rPr>
+              <a:t>상상해 보세요. </a:t>
+            </a:r>
+            <a:r>
+              <a:rPr lang="ko-KR" altLang="en-US" sz="2000" dirty="0">
+                <a:latin typeface="휴먼모음T" panose="02030504000101010101" pitchFamily="18" charset="-127"/>
+                <a:ea typeface="휴먼모음T" panose="02030504000101010101" pitchFamily="18" charset="-127"/>
+              </a:rPr>
+              <a:t>선생님이 무작위로 </a:t>
             </a:r>
             <a:r>
               <a:rPr lang="en-US" altLang="ko-KR" sz="2000" dirty="0">
                 <a:latin typeface="휴먼모음T" panose="02030504000101010101" pitchFamily="18" charset="-127"/>
                 <a:ea typeface="휴먼모음T" panose="02030504000101010101" pitchFamily="18" charset="-127"/>
               </a:rPr>
-              <a:t>N</a:t>
+              <a:t>1 </a:t>
             </a:r>
             <a:r>
               <a:rPr lang="ko-KR" altLang="en-US" sz="2000" dirty="0">
                 <a:latin typeface="휴먼모음T" panose="02030504000101010101" pitchFamily="18" charset="-127"/>
                 <a:ea typeface="휴먼모음T" panose="02030504000101010101" pitchFamily="18" charset="-127"/>
               </a:rPr>
-              <a:t>명이라면 몇 번째 만난 사람과 결혼을 해야 최적의 선택인가</a:t>
+              <a:t>명을 </a:t>
+            </a:r>
+            <a:r>
+              <a:rPr lang="ko-KR" altLang="ko-KR" sz="2000" dirty="0">
+                <a:latin typeface="휴먼모음T" panose="02030504000101010101" pitchFamily="18" charset="-127"/>
+                <a:ea typeface="휴먼모음T" panose="02030504000101010101" pitchFamily="18" charset="-127"/>
+              </a:rPr>
+              <a:t>뽑고</a:t>
+            </a:r>
+            <a:r>
+              <a:rPr lang="en-US" altLang="ko-KR" sz="2000" dirty="0">
+                <a:latin typeface="휴먼모음T" panose="02030504000101010101" pitchFamily="18" charset="-127"/>
+                <a:ea typeface="휴먼모음T" panose="02030504000101010101" pitchFamily="18" charset="-127"/>
+              </a:rPr>
+              <a:t> </a:t>
+            </a:r>
+            <a:r>
+              <a:rPr lang="ko-KR" altLang="en-US" sz="2000" dirty="0">
+                <a:latin typeface="휴먼모음T" panose="02030504000101010101" pitchFamily="18" charset="-127"/>
+                <a:ea typeface="휴먼모음T" panose="02030504000101010101" pitchFamily="18" charset="-127"/>
+              </a:rPr>
+              <a:t>선물을 주고</a:t>
+            </a:r>
+            <a:r>
+              <a:rPr lang="ko-KR" altLang="ko-KR" sz="2000" dirty="0">
+                <a:latin typeface="휴먼모음T" panose="02030504000101010101" pitchFamily="18" charset="-127"/>
+                <a:ea typeface="휴먼모음T" panose="02030504000101010101" pitchFamily="18" charset="-127"/>
+              </a:rPr>
+              <a:t>, </a:t>
+            </a:r>
+            <a:r>
+              <a:rPr lang="ko-KR" altLang="en-US" sz="2000" dirty="0">
+                <a:latin typeface="휴먼모음T" panose="02030504000101010101" pitchFamily="18" charset="-127"/>
+                <a:ea typeface="휴먼모음T" panose="02030504000101010101" pitchFamily="18" charset="-127"/>
+              </a:rPr>
+              <a:t>다시 전체 </a:t>
+            </a:r>
+            <a:r>
+              <a:rPr lang="en-US" altLang="ko-KR" sz="2000" dirty="0">
+                <a:latin typeface="휴먼모음T" panose="02030504000101010101" pitchFamily="18" charset="-127"/>
+                <a:ea typeface="휴먼모음T" panose="02030504000101010101" pitchFamily="18" charset="-127"/>
+              </a:rPr>
+              <a:t>100</a:t>
+            </a:r>
+            <a:r>
+              <a:rPr lang="ko-KR" altLang="en-US" sz="2000" dirty="0">
+                <a:latin typeface="휴먼모음T" panose="02030504000101010101" pitchFamily="18" charset="-127"/>
+                <a:ea typeface="휴먼모음T" panose="02030504000101010101" pitchFamily="18" charset="-127"/>
+              </a:rPr>
+              <a:t>명에서 </a:t>
+            </a:r>
+            <a:r>
+              <a:rPr lang="en-US" altLang="ko-KR" sz="2000" dirty="0">
+                <a:latin typeface="휴먼모음T" panose="02030504000101010101" pitchFamily="18" charset="-127"/>
+                <a:ea typeface="휴먼모음T" panose="02030504000101010101" pitchFamily="18" charset="-127"/>
+              </a:rPr>
+              <a:t>1</a:t>
+            </a:r>
+            <a:r>
+              <a:rPr lang="ko-KR" altLang="en-US" sz="2000" dirty="0">
+                <a:latin typeface="휴먼모음T" panose="02030504000101010101" pitchFamily="18" charset="-127"/>
+                <a:ea typeface="휴먼모음T" panose="02030504000101010101" pitchFamily="18" charset="-127"/>
+              </a:rPr>
+              <a:t>명을 뽑습니다</a:t>
+            </a:r>
+            <a:r>
+              <a:rPr lang="en-US" altLang="ko-KR" sz="2000" dirty="0">
+                <a:latin typeface="휴먼모음T" panose="02030504000101010101" pitchFamily="18" charset="-127"/>
+                <a:ea typeface="휴먼모음T" panose="02030504000101010101" pitchFamily="18" charset="-127"/>
+              </a:rPr>
+              <a:t>. </a:t>
+            </a:r>
+            <a:r>
+              <a:rPr lang="ko-KR" altLang="ko-KR" sz="2000" dirty="0">
+                <a:latin typeface="휴먼모음T" panose="02030504000101010101" pitchFamily="18" charset="-127"/>
+                <a:ea typeface="휴먼모음T" panose="02030504000101010101" pitchFamily="18" charset="-127"/>
+              </a:rPr>
+              <a:t>이 짓을 똑같이 100번 반복해서 </a:t>
+            </a:r>
+            <a:r>
+              <a:rPr lang="ko-KR" altLang="en-US" sz="2000" dirty="0">
+                <a:latin typeface="휴먼모음T" panose="02030504000101010101" pitchFamily="18" charset="-127"/>
+                <a:ea typeface="휴먼모음T" panose="02030504000101010101" pitchFamily="18" charset="-127"/>
+              </a:rPr>
+              <a:t>선물을 주게 될 경우 내가 선물을 못박을 확률은</a:t>
+            </a:r>
+            <a:r>
+              <a:rPr lang="en-US" altLang="ko-KR" sz="2000" dirty="0">
+                <a:latin typeface="휴먼모음T" panose="02030504000101010101" pitchFamily="18" charset="-127"/>
+                <a:ea typeface="휴먼모음T" panose="02030504000101010101" pitchFamily="18" charset="-127"/>
+              </a:rPr>
+              <a:t>?</a:t>
+            </a:r>
+          </a:p>
+          <a:p>
+            <a:pPr marL="285750" indent="-285750">
+              <a:lnSpc>
+                <a:spcPct val="150000"/>
+              </a:lnSpc>
+              <a:buFont typeface="Wingdings" panose="05000000000000000000" pitchFamily="2" charset="2"/>
+              <a:buChar char="v"/>
+            </a:pPr>
+            <a:r>
+              <a:rPr lang="en-US" altLang="ko-KR" sz="2000" dirty="0">
+                <a:latin typeface="휴먼모음T" panose="02030504000101010101" pitchFamily="18" charset="-127"/>
+                <a:ea typeface="휴먼모음T" panose="02030504000101010101" pitchFamily="18" charset="-127"/>
+              </a:rPr>
+              <a:t>200</a:t>
+            </a:r>
+            <a:r>
+              <a:rPr lang="ko-KR" altLang="en-US" sz="2000" dirty="0">
+                <a:latin typeface="휴먼모음T" panose="02030504000101010101" pitchFamily="18" charset="-127"/>
+                <a:ea typeface="휴먼모음T" panose="02030504000101010101" pitchFamily="18" charset="-127"/>
+              </a:rPr>
+              <a:t>번을 반복했는데 내가 못 받을 확률은</a:t>
+            </a:r>
+            <a:r>
+              <a:rPr lang="en-US" altLang="ko-KR" sz="2000" dirty="0">
+                <a:latin typeface="휴먼모음T" panose="02030504000101010101" pitchFamily="18" charset="-127"/>
+                <a:ea typeface="휴먼모음T" panose="02030504000101010101" pitchFamily="18" charset="-127"/>
+              </a:rPr>
+              <a:t>?</a:t>
+            </a:r>
+          </a:p>
+          <a:p>
+            <a:pPr marL="285750" indent="-285750">
+              <a:lnSpc>
+                <a:spcPct val="150000"/>
+              </a:lnSpc>
+              <a:buFont typeface="Wingdings" panose="05000000000000000000" pitchFamily="2" charset="2"/>
+              <a:buChar char="v"/>
+            </a:pPr>
+            <a:r>
+              <a:rPr lang="en-US" altLang="ko-KR" sz="2000" dirty="0">
+                <a:latin typeface="휴먼모음T" panose="02030504000101010101" pitchFamily="18" charset="-127"/>
+                <a:ea typeface="휴먼모음T" panose="02030504000101010101" pitchFamily="18" charset="-127"/>
+              </a:rPr>
+              <a:t>300</a:t>
+            </a:r>
+            <a:r>
+              <a:rPr lang="ko-KR" altLang="en-US" sz="2000" dirty="0">
+                <a:latin typeface="휴먼모음T" panose="02030504000101010101" pitchFamily="18" charset="-127"/>
+                <a:ea typeface="휴먼모음T" panose="02030504000101010101" pitchFamily="18" charset="-127"/>
+              </a:rPr>
+              <a:t>번을 반복했는데 내가 못 받을 확률은</a:t>
             </a:r>
             <a:r>
               <a:rPr lang="en-US" altLang="ko-KR" sz="2000" dirty="0">
@@ -8988,7 +9876,7 @@
           <p:cNvPr id="9" name="TextBox 8">
             <a:extLst>
               <a:ext uri="{FF2B5EF4-FFF2-40B4-BE49-F238E27FC236}">
-                <a16:creationId xmlns:a16="http://schemas.microsoft.com/office/drawing/2014/main" id="{D5A0FD1C-8CA9-3906-1CAB-19D923D4C28D}"/>
+                <a16:creationId xmlns:a16="http://schemas.microsoft.com/office/drawing/2014/main" id="{1A89527C-5F15-5354-51AE-303E2EF56CBE}"/>
               </a:ext>
             </a:extLst>
           </p:cNvPr>
@@ -9021,7 +9909,7 @@
     </p:spTree>
     <p:extLst>
       <p:ext uri="{BB962C8B-B14F-4D97-AF65-F5344CB8AC3E}">
-        <p14:creationId xmlns:p14="http://schemas.microsoft.com/office/powerpoint/2010/main" val="2479132389"/>
+        <p14:creationId xmlns:p14="http://schemas.microsoft.com/office/powerpoint/2010/main" val="1127705894"/>
       </p:ext>
     </p:extLst>
   </p:cSld>
@@ -9051,7 +9939,7 @@
         <p:cNvPr id="1" name="">
           <a:extLst>
             <a:ext uri="{FF2B5EF4-FFF2-40B4-BE49-F238E27FC236}">
-              <a16:creationId xmlns:a16="http://schemas.microsoft.com/office/drawing/2014/main" id="{D82F35E0-A8BA-9E25-DCE5-002AF8EF7215}"/>
+              <a16:creationId xmlns:a16="http://schemas.microsoft.com/office/drawing/2014/main" id="{FD863252-33CE-8BCC-AD7B-FF64CEC04133}"/>
             </a:ext>
           </a:extLst>
         </p:cNvPr>
@@ -9071,7 +9959,7 @@
           <p:cNvPr id="2" name="슬라이드 번호 개체 틀 1">
             <a:extLst>
               <a:ext uri="{FF2B5EF4-FFF2-40B4-BE49-F238E27FC236}">
-                <a16:creationId xmlns:a16="http://schemas.microsoft.com/office/drawing/2014/main" id="{CA6F4F7E-6F61-4FB4-D872-D19D234DDFD9}"/>
+                <a16:creationId xmlns:a16="http://schemas.microsoft.com/office/drawing/2014/main" id="{92BE835A-B5F4-F995-40C3-C7E940E4052B}"/>
               </a:ext>
             </a:extLst>
           </p:cNvPr>
@@ -9101,7 +9989,7 @@
           <p:cNvPr id="4" name="TextBox 3">
             <a:extLst>
               <a:ext uri="{FF2B5EF4-FFF2-40B4-BE49-F238E27FC236}">
-                <a16:creationId xmlns:a16="http://schemas.microsoft.com/office/drawing/2014/main" id="{0FFED543-95FD-70FD-6206-68419637947A}"/>
+                <a16:creationId xmlns:a16="http://schemas.microsoft.com/office/drawing/2014/main" id="{4B91CA6F-D833-6140-6621-352A7531D611}"/>
               </a:ext>
             </a:extLst>
           </p:cNvPr>
@@ -9111,7 +9999,7 @@
         <p:spPr>
           <a:xfrm>
             <a:off x="765820" y="1196752"/>
-            <a:ext cx="11233248" cy="882999"/>
+            <a:ext cx="11233248" cy="509178"/>
           </a:xfrm>
           <a:prstGeom prst="rect">
             <a:avLst/>
@@ -9137,142 +10025,33 @@
               <a:buChar char="v"/>
             </a:pPr>
             <a:r>
-              <a:rPr lang="ko-KR" altLang="en-US" dirty="0">
-                <a:latin typeface="휴먼모음T" panose="02030504000101010101" pitchFamily="18" charset="-127"/>
-                <a:ea typeface="휴먼모음T" panose="02030504000101010101" pitchFamily="18" charset="-127"/>
-              </a:rPr>
-              <a:t>모집단의 회귀식의 </a:t>
-            </a:r>
-            <a:r>
-              <a:rPr lang="en-US" altLang="ko-KR" dirty="0">
-                <a:latin typeface="휴먼모음T" panose="02030504000101010101" pitchFamily="18" charset="-127"/>
-                <a:ea typeface="휴먼모음T" panose="02030504000101010101" pitchFamily="18" charset="-127"/>
-              </a:rPr>
-              <a:t>gradient(</a:t>
-            </a:r>
-            <a:r>
-              <a:rPr lang="ko-KR" altLang="en-US" dirty="0">
-                <a:latin typeface="휴먼모음T" panose="02030504000101010101" pitchFamily="18" charset="-127"/>
-                <a:ea typeface="휴먼모음T" panose="02030504000101010101" pitchFamily="18" charset="-127"/>
-              </a:rPr>
-              <a:t>기울기</a:t>
-            </a:r>
-            <a:r>
-              <a:rPr lang="en-US" altLang="ko-KR" dirty="0">
-                <a:latin typeface="휴먼모음T" panose="02030504000101010101" pitchFamily="18" charset="-127"/>
-                <a:ea typeface="휴먼모음T" panose="02030504000101010101" pitchFamily="18" charset="-127"/>
-              </a:rPr>
-              <a:t>)</a:t>
-            </a:r>
-            <a:r>
-              <a:rPr lang="ko-KR" altLang="en-US" dirty="0">
-                <a:latin typeface="휴먼모음T" panose="02030504000101010101" pitchFamily="18" charset="-127"/>
-                <a:ea typeface="휴먼모음T" panose="02030504000101010101" pitchFamily="18" charset="-127"/>
-              </a:rPr>
-              <a:t> </a:t>
-            </a:r>
-            <a:r>
-              <a:rPr lang="en-US" altLang="ko-KR" dirty="0">
-                <a:latin typeface="휴먼모음T" panose="02030504000101010101" pitchFamily="18" charset="-127"/>
-                <a:ea typeface="휴먼모음T" panose="02030504000101010101" pitchFamily="18" charset="-127"/>
-              </a:rPr>
-              <a:t>2</a:t>
-            </a:r>
-            <a:r>
-              <a:rPr lang="ko-KR" altLang="en-US" dirty="0">
-                <a:latin typeface="휴먼모음T" panose="02030504000101010101" pitchFamily="18" charset="-127"/>
-                <a:ea typeface="휴먼모음T" panose="02030504000101010101" pitchFamily="18" charset="-127"/>
-              </a:rPr>
-              <a:t>인 데이터를 생성하고 표본크기를 </a:t>
-            </a:r>
-            <a:r>
-              <a:rPr lang="en-US" altLang="ko-KR" dirty="0">
-                <a:latin typeface="휴먼모음T" panose="02030504000101010101" pitchFamily="18" charset="-127"/>
-                <a:ea typeface="휴먼모음T" panose="02030504000101010101" pitchFamily="18" charset="-127"/>
-              </a:rPr>
-              <a:t>5, 30, 100 </a:t>
-            </a:r>
-            <a:r>
-              <a:rPr lang="ko-KR" altLang="en-US" dirty="0">
-                <a:latin typeface="휴먼모음T" panose="02030504000101010101" pitchFamily="18" charset="-127"/>
-                <a:ea typeface="휴먼모음T" panose="02030504000101010101" pitchFamily="18" charset="-127"/>
-              </a:rPr>
-              <a:t>으로 각각 </a:t>
-            </a:r>
-            <a:r>
-              <a:rPr lang="en-US" altLang="ko-KR" dirty="0">
-                <a:latin typeface="휴먼모음T" panose="02030504000101010101" pitchFamily="18" charset="-127"/>
-                <a:ea typeface="휴먼모음T" panose="02030504000101010101" pitchFamily="18" charset="-127"/>
-              </a:rPr>
-              <a:t>1000</a:t>
-            </a:r>
-            <a:r>
-              <a:rPr lang="ko-KR" altLang="en-US" dirty="0">
-                <a:latin typeface="휴먼모음T" panose="02030504000101010101" pitchFamily="18" charset="-127"/>
-                <a:ea typeface="휴먼모음T" panose="02030504000101010101" pitchFamily="18" charset="-127"/>
-              </a:rPr>
-              <a:t>개 표본의 기울기와 </a:t>
-            </a:r>
-            <a:r>
-              <a:rPr lang="en-US" altLang="ko-KR" dirty="0">
-                <a:latin typeface="휴먼모음T" panose="02030504000101010101" pitchFamily="18" charset="-127"/>
-                <a:ea typeface="휴먼모음T" panose="02030504000101010101" pitchFamily="18" charset="-127"/>
-              </a:rPr>
-              <a:t>MSE(Mean</a:t>
-            </a:r>
-            <a:r>
-              <a:rPr lang="ko-KR" altLang="en-US" dirty="0">
-                <a:latin typeface="휴먼모음T" panose="02030504000101010101" pitchFamily="18" charset="-127"/>
-                <a:ea typeface="휴먼모음T" panose="02030504000101010101" pitchFamily="18" charset="-127"/>
-              </a:rPr>
-              <a:t> </a:t>
-            </a:r>
-            <a:r>
-              <a:rPr lang="en-US" altLang="ko-KR" dirty="0">
-                <a:latin typeface="휴먼모음T" panose="02030504000101010101" pitchFamily="18" charset="-127"/>
-                <a:ea typeface="휴먼모음T" panose="02030504000101010101" pitchFamily="18" charset="-127"/>
-              </a:rPr>
-              <a:t>Squared</a:t>
-            </a:r>
-            <a:r>
-              <a:rPr lang="ko-KR" altLang="en-US" dirty="0">
-                <a:latin typeface="휴먼모음T" panose="02030504000101010101" pitchFamily="18" charset="-127"/>
-                <a:ea typeface="휴먼모음T" panose="02030504000101010101" pitchFamily="18" charset="-127"/>
-              </a:rPr>
-              <a:t> </a:t>
-            </a:r>
-            <a:r>
-              <a:rPr lang="en-US" altLang="ko-KR" dirty="0">
-                <a:latin typeface="휴먼모음T" panose="02030504000101010101" pitchFamily="18" charset="-127"/>
-                <a:ea typeface="휴먼모음T" panose="02030504000101010101" pitchFamily="18" charset="-127"/>
-              </a:rPr>
-              <a:t>Error)</a:t>
-            </a:r>
-            <a:r>
-              <a:rPr lang="ko-KR" altLang="en-US" dirty="0">
-                <a:latin typeface="휴먼모음T" panose="02030504000101010101" pitchFamily="18" charset="-127"/>
-                <a:ea typeface="휴먼모음T" panose="02030504000101010101" pitchFamily="18" charset="-127"/>
-              </a:rPr>
-              <a:t>의 평균과 분산을 </a:t>
-            </a:r>
-            <a:r>
-              <a:rPr lang="ko-KR" altLang="en-US" dirty="0" err="1">
-                <a:latin typeface="휴먼모음T" panose="02030504000101010101" pitchFamily="18" charset="-127"/>
-                <a:ea typeface="휴먼모음T" panose="02030504000101010101" pitchFamily="18" charset="-127"/>
-              </a:rPr>
-              <a:t>시각화하라</a:t>
-            </a:r>
-            <a:r>
-              <a:rPr lang="ko-KR" altLang="en-US" dirty="0">
-                <a:latin typeface="휴먼모음T" panose="02030504000101010101" pitchFamily="18" charset="-127"/>
-                <a:ea typeface="휴먼모음T" panose="02030504000101010101" pitchFamily="18" charset="-127"/>
-              </a:rPr>
-              <a:t>  </a:t>
-            </a:r>
-            <a:endParaRPr lang="en-US" altLang="ko-KR" dirty="0">
-              <a:latin typeface="휴먼모음T" panose="02030504000101010101" pitchFamily="18" charset="-127"/>
-              <a:ea typeface="휴먼모음T" panose="02030504000101010101" pitchFamily="18" charset="-127"/>
-            </a:endParaRPr>
+              <a:rPr lang="ko-KR" altLang="en-US" sz="2000" dirty="0">
+                <a:latin typeface="휴먼모음T" panose="02030504000101010101" pitchFamily="18" charset="-127"/>
+                <a:ea typeface="휴먼모음T" panose="02030504000101010101" pitchFamily="18" charset="-127"/>
+              </a:rPr>
+              <a:t>평생 미팅하는 상대방이 </a:t>
+            </a:r>
+            <a:r>
+              <a:rPr lang="en-US" altLang="ko-KR" sz="2000" dirty="0">
+                <a:latin typeface="휴먼모음T" panose="02030504000101010101" pitchFamily="18" charset="-127"/>
+                <a:ea typeface="휴먼모음T" panose="02030504000101010101" pitchFamily="18" charset="-127"/>
+              </a:rPr>
+              <a:t>N</a:t>
+            </a:r>
+            <a:r>
+              <a:rPr lang="ko-KR" altLang="en-US" sz="2000" dirty="0">
+                <a:latin typeface="휴먼모음T" panose="02030504000101010101" pitchFamily="18" charset="-127"/>
+                <a:ea typeface="휴먼모음T" panose="02030504000101010101" pitchFamily="18" charset="-127"/>
+              </a:rPr>
+              <a:t>명이라면 몇 번째 만난 사람과 결혼을 해야 최적의 선택인가</a:t>
+            </a:r>
+            <a:r>
+              <a:rPr lang="en-US" altLang="ko-KR" sz="2000" dirty="0">
+                <a:latin typeface="휴먼모음T" panose="02030504000101010101" pitchFamily="18" charset="-127"/>
+                <a:ea typeface="휴먼모음T" panose="02030504000101010101" pitchFamily="18" charset="-127"/>
+              </a:rPr>
+              <a:t>?</a:t>
+            </a:r>
           </a:p>
         </p:txBody>
       </p:sp>
@@ -9281,7 +10060,7 @@
           <p:cNvPr id="9" name="TextBox 8">
             <a:extLst>
               <a:ext uri="{FF2B5EF4-FFF2-40B4-BE49-F238E27FC236}">
-                <a16:creationId xmlns:a16="http://schemas.microsoft.com/office/drawing/2014/main" id="{F30D0FE0-2695-7F37-8905-B8DE24E7A394}"/>
+                <a16:creationId xmlns:a16="http://schemas.microsoft.com/office/drawing/2014/main" id="{D5A0FD1C-8CA9-3906-1CAB-19D923D4C28D}"/>
               </a:ext>
             </a:extLst>
           </p:cNvPr>
@@ -9311,274 +10090,10 @@
           </a:p>
         </p:txBody>
       </p:sp>
-      <p:pic>
-        <p:nvPicPr>
-          <p:cNvPr id="1026" name="Picture 2">
-            <a:extLst>
-              <a:ext uri="{FF2B5EF4-FFF2-40B4-BE49-F238E27FC236}">
-                <a16:creationId xmlns:a16="http://schemas.microsoft.com/office/drawing/2014/main" id="{66A96551-6CD7-9DE7-087B-11A115B1C22B}"/>
-              </a:ext>
-            </a:extLst>
-          </p:cNvPr>
-          <p:cNvPicPr>
-            <a:picLocks noChangeAspect="1" noChangeArrowheads="1"/>
-          </p:cNvPicPr>
-          <p:nvPr/>
-        </p:nvPicPr>
-        <p:blipFill>
-          <a:blip r:embed="rId3">
-            <a:extLst>
-              <a:ext uri="{28A0092B-C50C-407E-A947-70E740481C1C}">
-                <a14:useLocalDpi xmlns:a14="http://schemas.microsoft.com/office/drawing/2010/main" val="0"/>
-              </a:ext>
-            </a:extLst>
-          </a:blip>
-          <a:srcRect/>
-          <a:stretch>
-            <a:fillRect/>
-          </a:stretch>
-        </p:blipFill>
-        <p:spPr bwMode="auto">
-          <a:xfrm>
-            <a:off x="333772" y="3162993"/>
-            <a:ext cx="3721378" cy="2899706"/>
-          </a:xfrm>
-          <a:prstGeom prst="rect">
-            <a:avLst/>
-          </a:prstGeom>
-          <a:noFill/>
-          <a:extLst>
-            <a:ext uri="{909E8E84-426E-40DD-AFC4-6F175D3DCCD1}">
-              <a14:hiddenFill xmlns:a14="http://schemas.microsoft.com/office/drawing/2010/main">
-                <a:solidFill>
-                  <a:srgbClr val="FFFFFF"/>
-                </a:solidFill>
-              </a14:hiddenFill>
-            </a:ext>
-          </a:extLst>
-        </p:spPr>
-      </p:pic>
-      <p:sp>
-        <p:nvSpPr>
-          <p:cNvPr id="5" name="TextBox 4">
-            <a:extLst>
-              <a:ext uri="{FF2B5EF4-FFF2-40B4-BE49-F238E27FC236}">
-                <a16:creationId xmlns:a16="http://schemas.microsoft.com/office/drawing/2014/main" id="{92D6731E-3482-342B-4CF9-362C40D676CA}"/>
-              </a:ext>
-            </a:extLst>
-          </p:cNvPr>
-          <p:cNvSpPr txBox="1"/>
-          <p:nvPr/>
-        </p:nvSpPr>
-        <p:spPr>
-          <a:xfrm>
-            <a:off x="261764" y="2422823"/>
-            <a:ext cx="3721378" cy="718145"/>
-          </a:xfrm>
-          <a:prstGeom prst="rect">
-            <a:avLst/>
-          </a:prstGeom>
-          <a:noFill/>
-        </p:spPr>
-        <p:txBody>
-          <a:bodyPr wrap="square">
-            <a:spAutoFit/>
-          </a:bodyPr>
-          <a:lstStyle/>
-          <a:p>
-            <a:pPr>
-              <a:lnSpc>
-                <a:spcPts val="1575"/>
-              </a:lnSpc>
-              <a:buNone/>
-            </a:pPr>
-            <a:r>
-              <a:rPr lang="en-US" altLang="ko-KR" sz="1400" b="0" dirty="0">
-                <a:effectLst/>
-                <a:latin typeface="Arial Narrow" panose="020B0606020202030204" pitchFamily="34" charset="0"/>
-              </a:rPr>
-              <a:t>X = </a:t>
-            </a:r>
-            <a:r>
-              <a:rPr lang="en-US" altLang="ko-KR" sz="1400" b="0" dirty="0" err="1">
-                <a:effectLst/>
-                <a:latin typeface="Arial Narrow" panose="020B0606020202030204" pitchFamily="34" charset="0"/>
-              </a:rPr>
-              <a:t>np.random.randn</a:t>
-            </a:r>
-            <a:r>
-              <a:rPr lang="en-US" altLang="ko-KR" sz="1400" b="0" dirty="0">
-                <a:effectLst/>
-                <a:latin typeface="Arial Narrow" panose="020B0606020202030204" pitchFamily="34" charset="0"/>
-              </a:rPr>
-              <a:t>(10000, 1)</a:t>
-            </a:r>
-          </a:p>
-          <a:p>
-            <a:pPr>
-              <a:lnSpc>
-                <a:spcPts val="1575"/>
-              </a:lnSpc>
-              <a:buNone/>
-            </a:pPr>
-            <a:r>
-              <a:rPr lang="en-US" altLang="ko-KR" sz="1400" b="0" dirty="0" err="1">
-                <a:effectLst/>
-                <a:latin typeface="Arial Narrow" panose="020B0606020202030204" pitchFamily="34" charset="0"/>
-              </a:rPr>
-              <a:t>true_w</a:t>
-            </a:r>
-            <a:r>
-              <a:rPr lang="en-US" altLang="ko-KR" sz="1400" b="0" dirty="0">
-                <a:effectLst/>
-                <a:latin typeface="Arial Narrow" panose="020B0606020202030204" pitchFamily="34" charset="0"/>
-              </a:rPr>
-              <a:t> = 2.0</a:t>
-            </a:r>
-          </a:p>
-          <a:p>
-            <a:pPr>
-              <a:lnSpc>
-                <a:spcPts val="1575"/>
-              </a:lnSpc>
-              <a:buNone/>
-            </a:pPr>
-            <a:r>
-              <a:rPr lang="en-US" altLang="ko-KR" sz="1400" b="0" dirty="0">
-                <a:effectLst/>
-                <a:latin typeface="Arial Narrow" panose="020B0606020202030204" pitchFamily="34" charset="0"/>
-              </a:rPr>
-              <a:t>y = </a:t>
-            </a:r>
-            <a:r>
-              <a:rPr lang="en-US" altLang="ko-KR" sz="1400" b="0" dirty="0" err="1">
-                <a:effectLst/>
-                <a:latin typeface="Arial Narrow" panose="020B0606020202030204" pitchFamily="34" charset="0"/>
-              </a:rPr>
-              <a:t>true_w</a:t>
-            </a:r>
-            <a:r>
-              <a:rPr lang="en-US" altLang="ko-KR" sz="1400" b="0" dirty="0">
-                <a:effectLst/>
-                <a:latin typeface="Arial Narrow" panose="020B0606020202030204" pitchFamily="34" charset="0"/>
-              </a:rPr>
-              <a:t> * X + </a:t>
-            </a:r>
-            <a:r>
-              <a:rPr lang="en-US" altLang="ko-KR" sz="1400" b="0" dirty="0" err="1">
-                <a:effectLst/>
-                <a:latin typeface="Arial Narrow" panose="020B0606020202030204" pitchFamily="34" charset="0"/>
-              </a:rPr>
-              <a:t>np.random.randn</a:t>
-            </a:r>
-            <a:r>
-              <a:rPr lang="en-US" altLang="ko-KR" sz="1400" b="0" dirty="0">
-                <a:effectLst/>
-                <a:latin typeface="Arial Narrow" panose="020B0606020202030204" pitchFamily="34" charset="0"/>
-              </a:rPr>
-              <a:t>(10000, 1) * 0.5</a:t>
-            </a:r>
-          </a:p>
-        </p:txBody>
-      </p:sp>
-      <p:pic>
-        <p:nvPicPr>
-          <p:cNvPr id="1030" name="Picture 6">
-            <a:extLst>
-              <a:ext uri="{FF2B5EF4-FFF2-40B4-BE49-F238E27FC236}">
-                <a16:creationId xmlns:a16="http://schemas.microsoft.com/office/drawing/2014/main" id="{604A6947-78A3-C7CA-2B50-5D00DD4F3DDD}"/>
-              </a:ext>
-            </a:extLst>
-          </p:cNvPr>
-          <p:cNvPicPr>
-            <a:picLocks noChangeAspect="1" noChangeArrowheads="1"/>
-          </p:cNvPicPr>
-          <p:nvPr/>
-        </p:nvPicPr>
-        <p:blipFill>
-          <a:blip r:embed="rId4" cstate="print">
-            <a:extLst>
-              <a:ext uri="{28A0092B-C50C-407E-A947-70E740481C1C}">
-                <a14:useLocalDpi xmlns:a14="http://schemas.microsoft.com/office/drawing/2010/main" val="0"/>
-              </a:ext>
-            </a:extLst>
-          </a:blip>
-          <a:srcRect/>
-          <a:stretch>
-            <a:fillRect/>
-          </a:stretch>
-        </p:blipFill>
-        <p:spPr bwMode="auto">
-          <a:xfrm>
-            <a:off x="5307995" y="2469173"/>
-            <a:ext cx="5832647" cy="1919654"/>
-          </a:xfrm>
-          <a:prstGeom prst="rect">
-            <a:avLst/>
-          </a:prstGeom>
-          <a:noFill/>
-          <a:extLst>
-            <a:ext uri="{909E8E84-426E-40DD-AFC4-6F175D3DCCD1}">
-              <a14:hiddenFill xmlns:a14="http://schemas.microsoft.com/office/drawing/2010/main">
-                <a:solidFill>
-                  <a:srgbClr val="FFFFFF"/>
-                </a:solidFill>
-              </a14:hiddenFill>
-            </a:ext>
-          </a:extLst>
-        </p:spPr>
-      </p:pic>
-      <p:pic>
-        <p:nvPicPr>
-          <p:cNvPr id="1032" name="Picture 8">
-            <a:extLst>
-              <a:ext uri="{FF2B5EF4-FFF2-40B4-BE49-F238E27FC236}">
-                <a16:creationId xmlns:a16="http://schemas.microsoft.com/office/drawing/2014/main" id="{0AC33CC4-6C35-C6FD-C03A-DFEEFB9013D3}"/>
-              </a:ext>
-            </a:extLst>
-          </p:cNvPr>
-          <p:cNvPicPr>
-            <a:picLocks noChangeAspect="1" noChangeArrowheads="1"/>
-          </p:cNvPicPr>
-          <p:nvPr/>
-        </p:nvPicPr>
-        <p:blipFill>
-          <a:blip r:embed="rId5" cstate="print">
-            <a:extLst>
-              <a:ext uri="{28A0092B-C50C-407E-A947-70E740481C1C}">
-                <a14:useLocalDpi xmlns:a14="http://schemas.microsoft.com/office/drawing/2010/main" val="0"/>
-              </a:ext>
-            </a:extLst>
-          </a:blip>
-          <a:srcRect/>
-          <a:stretch>
-            <a:fillRect/>
-          </a:stretch>
-        </p:blipFill>
-        <p:spPr bwMode="auto">
-          <a:xfrm>
-            <a:off x="5302324" y="4701421"/>
-            <a:ext cx="5832647" cy="1919653"/>
-          </a:xfrm>
-          <a:prstGeom prst="rect">
-            <a:avLst/>
-          </a:prstGeom>
-          <a:noFill/>
-          <a:extLst>
-            <a:ext uri="{909E8E84-426E-40DD-AFC4-6F175D3DCCD1}">
-              <a14:hiddenFill xmlns:a14="http://schemas.microsoft.com/office/drawing/2010/main">
-                <a:solidFill>
-                  <a:srgbClr val="FFFFFF"/>
-                </a:solidFill>
-              </a14:hiddenFill>
-            </a:ext>
-          </a:extLst>
-        </p:spPr>
-      </p:pic>
     </p:spTree>
     <p:extLst>
       <p:ext uri="{BB962C8B-B14F-4D97-AF65-F5344CB8AC3E}">
-        <p14:creationId xmlns:p14="http://schemas.microsoft.com/office/powerpoint/2010/main" val="2060882861"/>
+        <p14:creationId xmlns:p14="http://schemas.microsoft.com/office/powerpoint/2010/main" val="2479132389"/>
       </p:ext>
     </p:extLst>
   </p:cSld>
@@ -10401,6 +10916,15 @@
 </file>
 
 <file path=customXml/item1.xml><?xml version="1.0" encoding="utf-8"?>
+<?mso-contentType ?>
+<FormTemplates xmlns="http://schemas.microsoft.com/sharepoint/v3/contenttype/forms">
+  <Display>DocumentLibraryForm</Display>
+  <Edit>DocumentLibraryForm</Edit>
+  <New>DocumentLibraryForm</New>
+</FormTemplates>
+</file>
+
+<file path=customXml/item2.xml><?xml version="1.0" encoding="utf-8"?>
 <p:properties xmlns:p="http://schemas.microsoft.com/office/2006/metadata/properties" xmlns:xsi="http://www.w3.org/2001/XMLSchema-instance" xmlns:pc="http://schemas.microsoft.com/office/infopath/2007/PartnerControls">
   <documentManagement>
     <VSO_x0020_item_x0020_id xmlns="40262f94-9f35-4ac3-9a90-690165a166b7" xsi:nil="true"/>
@@ -10409,15 +10933,6 @@
     <Template_x0020_details xmlns="40262f94-9f35-4ac3-9a90-690165a166b7" xsi:nil="true"/>
   </documentManagement>
 </p:properties>
-</file>
-
-<file path=customXml/item2.xml><?xml version="1.0" encoding="utf-8"?>
-<?mso-contentType ?>
-<FormTemplates xmlns="http://schemas.microsoft.com/sharepoint/v3/contenttype/forms">
-  <Display>DocumentLibraryForm</Display>
-  <Edit>DocumentLibraryForm</Edit>
-  <New>DocumentLibraryForm</New>
-</FormTemplates>
 </file>
 
 <file path=customXml/item3.xml><?xml version="1.0" encoding="utf-8"?>
@@ -10602,6 +11117,14 @@
 </file>
 
 <file path=customXml/itemProps1.xml><?xml version="1.0" encoding="utf-8"?>
+<ds:datastoreItem xmlns:ds="http://schemas.openxmlformats.org/officeDocument/2006/customXml" ds:itemID="{7F9B8BCC-BF24-4800-92E1-9F891BBB27E6}">
+  <ds:schemaRefs>
+    <ds:schemaRef ds:uri="http://schemas.microsoft.com/sharepoint/v3/contenttype/forms"/>
+  </ds:schemaRefs>
+</ds:datastoreItem>
+</file>
+
+<file path=customXml/itemProps2.xml><?xml version="1.0" encoding="utf-8"?>
 <ds:datastoreItem xmlns:ds="http://schemas.openxmlformats.org/officeDocument/2006/customXml" ds:itemID="{50AACE6D-8EB6-447A-8DFD-C2C0C52916AC}">
   <ds:schemaRefs>
     <ds:schemaRef ds:uri="a4f35948-e619-41b3-aa29-22878b09cfd2"/>
@@ -10614,14 +11137,6 @@
     <ds:schemaRef ds:uri="http://schemas.openxmlformats.org/package/2006/metadata/core-properties"/>
     <ds:schemaRef ds:uri="http://www.w3.org/XML/1998/namespace"/>
     <ds:schemaRef ds:uri="http://purl.org/dc/terms/"/>
-  </ds:schemaRefs>
-</ds:datastoreItem>
-</file>
-
-<file path=customXml/itemProps2.xml><?xml version="1.0" encoding="utf-8"?>
-<ds:datastoreItem xmlns:ds="http://schemas.openxmlformats.org/officeDocument/2006/customXml" ds:itemID="{7F9B8BCC-BF24-4800-92E1-9F891BBB27E6}">
-  <ds:schemaRefs>
-    <ds:schemaRef ds:uri="http://schemas.microsoft.com/sharepoint/v3/contenttype/forms"/>
   </ds:schemaRefs>
 </ds:datastoreItem>
 </file>
